--- a/Design Thinking_Internship.pptx
+++ b/Design Thinking_Internship.pptx
@@ -3154,8 +3154,8 @@
         </p:nvSpPr>
         <p:spPr>
           <a:xfrm>
-            <a:off x="914400" y="1097280"/>
-            <a:ext cx="10362895" cy="2743200"/>
+            <a:off x="914400" y="822960"/>
+            <a:ext cx="10362895" cy="2926080"/>
           </a:xfrm>
           <a:prstGeom prst="rect">
             <a:avLst/>
@@ -3163,15 +3163,18 @@
           <a:noFill/>
         </p:spPr>
         <p:txBody>
-          <a:bodyPr wrap="square">
+          <a:bodyPr wrap="square" lIns="0" tIns="0" rIns="0" bIns="0">
             <a:spAutoFit/>
           </a:bodyPr>
           <a:lstStyle/>
           <a:p>
             <a:pPr>
-              <a:defRPr sz="1400" b="1">
-                <a:solidFill>
-                  <a:srgbClr val="93C5FD"/>
+              <a:spcAft>
+                <a:spcPts val="1000"/>
+              </a:spcAft>
+              <a:defRPr sz="1300" b="1">
+                <a:solidFill>
+                  <a:srgbClr val="60A5FA"/>
                 </a:solidFill>
               </a:defRPr>
             </a:pPr>
@@ -3181,26 +3184,44 @@
           </a:p>
           <a:p>
             <a:pPr>
-              <a:defRPr sz="3200" b="1">
+              <a:defRPr sz="4600" b="1">
                 <a:solidFill>
                   <a:srgbClr val="FFFFFF"/>
                 </a:solidFill>
               </a:defRPr>
             </a:pPr>
             <a:r>
-              <a:t>CampusShare: Peer-to-Peer Campus Resource &amp; Book Exchange</a:t>
-            </a:r>
-          </a:p>
-          <a:p>
-            <a:pPr>
-              <a:defRPr sz="1800">
+              <a:t>CampusShare</a:t>
+            </a:r>
+          </a:p>
+          <a:p>
+            <a:pPr>
+              <a:spcBef>
+                <a:spcPts val="800"/>
+              </a:spcBef>
+              <a:defRPr sz="2000">
                 <a:solidFill>
                   <a:srgbClr val="CBD5E1"/>
                 </a:solidFill>
               </a:defRPr>
             </a:pPr>
             <a:r>
-              <a:t>A Closed-Loop Circular Economy Platform for Engineering Students</a:t>
+              <a:t>A Peer-to-Peer Campus Resource &amp; Academic Exchange Platform</a:t>
+            </a:r>
+          </a:p>
+          <a:p>
+            <a:pPr>
+              <a:spcBef>
+                <a:spcPts val="600"/>
+              </a:spcBef>
+              <a:defRPr sz="1200">
+                <a:solidFill>
+                  <a:srgbClr val="94A3B8"/>
+                </a:solidFill>
+              </a:defRPr>
+            </a:pPr>
+            <a:r>
+              <a:t>Manipal Institute of Technology Bengaluru • Manipal Academy of Higher Education (MAHE)</a:t>
             </a:r>
           </a:p>
         </p:txBody>
@@ -3214,7 +3235,7 @@
         <p:spPr>
           <a:xfrm>
             <a:off x="914400" y="4114800"/>
-            <a:ext cx="4937760" cy="2011680"/>
+            <a:ext cx="4937760" cy="2103120"/>
           </a:xfrm>
           <a:prstGeom prst="roundRect">
             <a:avLst/>
@@ -3243,22 +3264,28 @@
           </a:fontRef>
         </p:style>
         <p:txBody>
-          <a:bodyPr rtlCol="0" anchor="ctr" wrap="square"/>
+          <a:bodyPr rtlCol="0" anchor="ctr" wrap="square" lIns="274320" rIns="274320" tIns="228600" bIns="228600"/>
           <a:lstStyle/>
           <a:p>
             <a:pPr algn="ctr">
-              <a:defRPr b="1" sz="1200">
+              <a:spcAft>
+                <a:spcPts val="600"/>
+              </a:spcAft>
+              <a:defRPr b="1" sz="1150">
                 <a:solidFill>
                   <a:srgbClr val="60A5FA"/>
                 </a:solidFill>
               </a:defRPr>
             </a:pPr>
             <a:r>
-              <a:t>PRESENTED BY:</a:t>
-            </a:r>
-          </a:p>
-          <a:p>
-            <a:pPr>
+              <a:t>PROJECT TEAM MEMBERS:</a:t>
+            </a:r>
+          </a:p>
+          <a:p>
+            <a:pPr>
+              <a:spcAft>
+                <a:spcPts val="600"/>
+              </a:spcAft>
               <a:defRPr sz="1300">
                 <a:solidFill>
                   <a:srgbClr val="FFFFFF"/>
@@ -3271,6 +3298,9 @@
           </a:p>
           <a:p>
             <a:pPr>
+              <a:spcAft>
+                <a:spcPts val="600"/>
+              </a:spcAft>
               <a:defRPr sz="1300">
                 <a:solidFill>
                   <a:srgbClr val="FFFFFF"/>
@@ -3279,30 +3309,6 @@
             </a:pPr>
             <a:r>
               <a:t>2. Team Member 2 (Reg. No: 2309xxxxx)</a:t>
-            </a:r>
-          </a:p>
-          <a:p>
-            <a:pPr>
-              <a:defRPr sz="1300">
-                <a:solidFill>
-                  <a:srgbClr val="FFFFFF"/>
-                </a:solidFill>
-              </a:defRPr>
-            </a:pPr>
-            <a:r>
-              <a:t>3. Team Member 3 (Reg. No: 2309xxxxx)</a:t>
-            </a:r>
-          </a:p>
-          <a:p>
-            <a:pPr>
-              <a:defRPr sz="1300">
-                <a:solidFill>
-                  <a:srgbClr val="FFFFFF"/>
-                </a:solidFill>
-              </a:defRPr>
-            </a:pPr>
-            <a:r>
-              <a:t>4. Team Member 4 (Reg. No: 2309xxxxx)</a:t>
             </a:r>
           </a:p>
         </p:txBody>
@@ -3316,7 +3322,7 @@
         <p:spPr>
           <a:xfrm>
             <a:off x="6309360" y="4114800"/>
-            <a:ext cx="4937760" cy="2011680"/>
+            <a:ext cx="4937760" cy="2103120"/>
           </a:xfrm>
           <a:prstGeom prst="roundRect">
             <a:avLst/>
@@ -3345,11 +3351,14 @@
           </a:fontRef>
         </p:style>
         <p:txBody>
-          <a:bodyPr rtlCol="0" anchor="ctr" wrap="square"/>
+          <a:bodyPr rtlCol="0" anchor="ctr" wrap="square" lIns="274320" rIns="274320" tIns="228600" bIns="228600"/>
           <a:lstStyle/>
           <a:p>
             <a:pPr algn="ctr">
-              <a:defRPr b="1" sz="1200">
+              <a:spcAft>
+                <a:spcPts val="600"/>
+              </a:spcAft>
+              <a:defRPr b="1" sz="1150">
                 <a:solidFill>
                   <a:srgbClr val="60A5FA"/>
                 </a:solidFill>
@@ -3361,7 +3370,10 @@
           </a:p>
           <a:p>
             <a:pPr>
-              <a:defRPr sz="1300">
+              <a:spcAft>
+                <a:spcPts val="300"/>
+              </a:spcAft>
+              <a:defRPr sz="1200">
                 <a:solidFill>
                   <a:srgbClr val="FFFFFF"/>
                 </a:solidFill>
@@ -3373,19 +3385,25 @@
           </a:p>
           <a:p>
             <a:pPr>
-              <a:defRPr sz="1300">
+              <a:spcAft>
+                <a:spcPts val="300"/>
+              </a:spcAft>
+              <a:defRPr sz="1200">
                 <a:solidFill>
                   <a:srgbClr val="FFFFFF"/>
                 </a:solidFill>
               </a:defRPr>
             </a:pPr>
             <a:r>
-              <a:t>Associate Professor</a:t>
-            </a:r>
-          </a:p>
-          <a:p>
-            <a:pPr>
-              <a:defRPr sz="1300">
+              <a:t>Associate Professor, Department of Humanities</a:t>
+            </a:r>
+          </a:p>
+          <a:p>
+            <a:pPr>
+              <a:spcAft>
+                <a:spcPts val="300"/>
+              </a:spcAft>
+              <a:defRPr sz="1200">
                 <a:solidFill>
                   <a:srgbClr val="FFFFFF"/>
                 </a:solidFill>
@@ -3397,7 +3415,10 @@
           </a:p>
           <a:p>
             <a:pPr>
-              <a:defRPr sz="1300">
+              <a:spcAft>
+                <a:spcPts val="300"/>
+              </a:spcAft>
+              <a:defRPr sz="1200">
                 <a:solidFill>
                   <a:srgbClr val="FFFFFF"/>
                 </a:solidFill>
@@ -3435,7 +3456,7 @@
         </p:nvSpPr>
         <p:spPr>
           <a:xfrm>
-            <a:off x="731520" y="365760"/>
+            <a:off x="731520" y="502920"/>
             <a:ext cx="10728655" cy="1005840"/>
           </a:xfrm>
           <a:prstGeom prst="rect">
@@ -3450,9 +3471,12 @@
           <a:lstStyle/>
           <a:p>
             <a:pPr>
+              <a:spcAft>
+                <a:spcPts val="200"/>
+              </a:spcAft>
               <a:defRPr sz="1100" b="1">
                 <a:solidFill>
-                  <a:srgbClr val="2563EB"/>
+                  <a:srgbClr val="0071E3"/>
                 </a:solidFill>
               </a:defRPr>
             </a:pPr>
@@ -3482,8 +3506,8 @@
         </p:nvSpPr>
         <p:spPr>
           <a:xfrm>
-            <a:off x="731520" y="1280160"/>
-            <a:ext cx="10728655" cy="36576"/>
+            <a:off x="731520" y="1371600"/>
+            <a:ext cx="10728655" cy="22860"/>
           </a:xfrm>
           <a:prstGeom prst="rect">
             <a:avLst/>
@@ -3492,9 +3516,7 @@
             <a:srgbClr val="2563EB"/>
           </a:solidFill>
           <a:ln>
-            <a:solidFill>
-              <a:srgbClr val="2563EB"/>
-            </a:solidFill>
+            <a:noFill/>
           </a:ln>
         </p:spPr>
         <p:style>
@@ -3527,14 +3549,14 @@
         </p:nvSpPr>
         <p:spPr>
           <a:xfrm>
-            <a:off x="731520" y="1554480"/>
-            <a:ext cx="5120640" cy="4846320"/>
+            <a:off x="731520" y="1600200"/>
+            <a:ext cx="5166360" cy="4709160"/>
           </a:xfrm>
           <a:prstGeom prst="roundRect">
             <a:avLst/>
           </a:prstGeom>
           <a:solidFill>
-            <a:srgbClr val="F1F5F9"/>
+            <a:srgbClr val="F8FAFC"/>
           </a:solidFill>
           <a:ln>
             <a:solidFill>
@@ -3557,10 +3579,13 @@
           </a:fontRef>
         </p:style>
         <p:txBody>
-          <a:bodyPr rtlCol="0" anchor="ctr" wrap="square"/>
+          <a:bodyPr rtlCol="0" anchor="ctr" wrap="square" lIns="320040" rIns="320040" tIns="292608" bIns="292608"/>
           <a:lstStyle/>
           <a:p>
             <a:pPr algn="ctr">
+              <a:spcAft>
+                <a:spcPts val="1200"/>
+              </a:spcAft>
               <a:defRPr sz="1600" b="1">
                 <a:solidFill>
                   <a:srgbClr val="2563EB"/>
@@ -3568,45 +3593,45 @@
               </a:defRPr>
             </a:pPr>
             <a:r>
-              <a:t>Primary User Personas</a:t>
-            </a:r>
-          </a:p>
-          <a:p>
-            <a:pPr>
-              <a:spcAft>
-                <a:spcPts val="800"/>
-              </a:spcAft>
-              <a:defRPr sz="1300">
-                <a:solidFill>
-                  <a:srgbClr val="0F172A"/>
-                </a:solidFill>
-              </a:defRPr>
-            </a:pPr>
-            <a:r>
-              <a:t>•  Persona 1: 'The Cost-Conscious Fresher' (Aditi, 1st Year CSE)</a:t>
+              <a:t>Primary Student Personas</a:t>
+            </a:r>
+          </a:p>
+          <a:p>
+            <a:pPr>
+              <a:spcAft>
+                <a:spcPts val="900"/>
+              </a:spcAft>
+              <a:defRPr sz="1200">
+                <a:solidFill>
+                  <a:srgbClr val="0F172A"/>
+                </a:solidFill>
+              </a:defRPr>
+            </a:pPr>
+            <a:r>
+              <a:t>•  Persona 1: 'The Cost-Conscious Fresher' (1st-Year Engineering Student)</a:t>
             </a:r>
             <a:br/>
             <a:r>
-              <a:t>Needs: Casio fx-991 calculator, chemistry lab coat, B.S. Grewal math book. Goal: Save money and pass 1st semester exams without buying expensive new tools.</a:t>
-            </a:r>
-          </a:p>
-          <a:p>
-            <a:pPr>
-              <a:spcAft>
-                <a:spcPts val="800"/>
-              </a:spcAft>
-              <a:defRPr sz="1300">
-                <a:solidFill>
-                  <a:srgbClr val="0F172A"/>
-                </a:solidFill>
-              </a:defRPr>
-            </a:pPr>
-            <a:r>
-              <a:t>•  Persona 2: 'The Graduating Senior' (Rohan, 4th Year Mech)</a:t>
+              <a:t>Needs: Reference mathematics textbooks, scientific calculators, and standard chemistry lab coats. Goal: Successfully complete 1st-year practicals and exams without paying premium retail prices for single-term items.</a:t>
+            </a:r>
+          </a:p>
+          <a:p>
+            <a:pPr>
+              <a:spcAft>
+                <a:spcPts val="900"/>
+              </a:spcAft>
+              <a:defRPr sz="1200">
+                <a:solidFill>
+                  <a:srgbClr val="0F172A"/>
+                </a:solidFill>
+              </a:defRPr>
+            </a:pPr>
+            <a:r>
+              <a:t>•  Persona 2: 'The Graduating Senior' (4th-Year Outgoing Student)</a:t>
             </a:r>
             <a:br/>
             <a:r>
-              <a:t>Needs: Clear out hostel room before moving out. Has mini-drafters, Arduino kits, and textbooks. Goal: Hand over items quickly to juniors and recover nominal pocket money.</a:t>
+              <a:t>Needs: Efficiently declutter hostel room prior to campus departure. Goal: Seamlessly pass down working drafters, developer kits, and course literature to juniors while recovering modest pocket funds.</a:t>
             </a:r>
           </a:p>
         </p:txBody>
@@ -3619,14 +3644,14 @@
         </p:nvSpPr>
         <p:spPr>
           <a:xfrm>
-            <a:off x="6309360" y="1554480"/>
-            <a:ext cx="5120640" cy="4846320"/>
+            <a:off x="6291072" y="1600200"/>
+            <a:ext cx="5166360" cy="4709160"/>
           </a:xfrm>
           <a:prstGeom prst="roundRect">
             <a:avLst/>
           </a:prstGeom>
           <a:solidFill>
-            <a:srgbClr val="F1F5F9"/>
+            <a:srgbClr val="F8FAFC"/>
           </a:solidFill>
           <a:ln>
             <a:solidFill>
@@ -3649,10 +3674,13 @@
           </a:fontRef>
         </p:style>
         <p:txBody>
-          <a:bodyPr rtlCol="0" anchor="ctr" wrap="square"/>
+          <a:bodyPr rtlCol="0" anchor="ctr" wrap="square" lIns="320040" rIns="320040" tIns="292608" bIns="292608"/>
           <a:lstStyle/>
           <a:p>
             <a:pPr algn="ctr">
+              <a:spcAft>
+                <a:spcPts val="1200"/>
+              </a:spcAft>
               <a:defRPr sz="1600" b="1">
                 <a:solidFill>
                   <a:srgbClr val="2563EB"/>
@@ -3660,15 +3688,15 @@
               </a:defRPr>
             </a:pPr>
             <a:r>
-              <a:t>Secondary Stakeholders</a:t>
-            </a:r>
-          </a:p>
-          <a:p>
-            <a:pPr>
-              <a:spcAft>
-                <a:spcPts val="800"/>
-              </a:spcAft>
-              <a:defRPr sz="1300">
+              <a:t>Institutional Stakeholders</a:t>
+            </a:r>
+          </a:p>
+          <a:p>
+            <a:pPr>
+              <a:spcAft>
+                <a:spcPts val="900"/>
+              </a:spcAft>
+              <a:defRPr sz="1200">
                 <a:solidFill>
                   <a:srgbClr val="0F172A"/>
                 </a:solidFill>
@@ -3679,15 +3707,15 @@
             </a:r>
             <a:br/>
             <a:r>
-              <a:t>Needs: Ensure all students arrive equipped with standard approved instruments (safety goggles, calculators). Goal: Reduce lab delays caused by missing tools.</a:t>
-            </a:r>
-          </a:p>
-          <a:p>
-            <a:pPr>
-              <a:spcAft>
-                <a:spcPts val="800"/>
-              </a:spcAft>
-              <a:defRPr sz="1300">
+              <a:t>Needs: Ensure students arrive punctually equipped with standard approved instruments (safety goggles, calculators). Goal: Eliminate practical class delays caused by missing tools.</a:t>
+            </a:r>
+          </a:p>
+          <a:p>
+            <a:pPr>
+              <a:spcAft>
+                <a:spcPts val="900"/>
+              </a:spcAft>
+              <a:defRPr sz="1200">
                 <a:solidFill>
                   <a:srgbClr val="0F172A"/>
                 </a:solidFill>
@@ -3698,7 +3726,7 @@
             </a:r>
             <a:br/>
             <a:r>
-              <a:t>Needs: Promote zero-waste and circular resource utilization on campus. Goal: Reduce discarded paper and plastic equipment in hostel waste bins.</a:t>
+              <a:t>Needs: Enforce circular resource utilization and responsible campus consumption. Goal: Reduce usable paper and plastic academic gear deposited in hostel waste disposal.</a:t>
             </a:r>
           </a:p>
         </p:txBody>
@@ -3729,7 +3757,7 @@
         </p:nvSpPr>
         <p:spPr>
           <a:xfrm>
-            <a:off x="731520" y="365760"/>
+            <a:off x="731520" y="502920"/>
             <a:ext cx="10728655" cy="1005840"/>
           </a:xfrm>
           <a:prstGeom prst="rect">
@@ -3744,9 +3772,12 @@
           <a:lstStyle/>
           <a:p>
             <a:pPr>
+              <a:spcAft>
+                <a:spcPts val="200"/>
+              </a:spcAft>
               <a:defRPr sz="1100" b="1">
                 <a:solidFill>
-                  <a:srgbClr val="2563EB"/>
+                  <a:srgbClr val="0071E3"/>
                 </a:solidFill>
               </a:defRPr>
             </a:pPr>
@@ -3776,8 +3807,8 @@
         </p:nvSpPr>
         <p:spPr>
           <a:xfrm>
-            <a:off x="731520" y="1280160"/>
-            <a:ext cx="10728655" cy="36576"/>
+            <a:off x="731520" y="1371600"/>
+            <a:ext cx="10728655" cy="22860"/>
           </a:xfrm>
           <a:prstGeom prst="rect">
             <a:avLst/>
@@ -3786,9 +3817,7 @@
             <a:srgbClr val="2563EB"/>
           </a:solidFill>
           <a:ln>
-            <a:solidFill>
-              <a:srgbClr val="2563EB"/>
-            </a:solidFill>
+            <a:noFill/>
           </a:ln>
         </p:spPr>
         <p:style>
@@ -3821,14 +3850,14 @@
         </p:nvSpPr>
         <p:spPr>
           <a:xfrm>
-            <a:off x="731520" y="1554480"/>
-            <a:ext cx="5120640" cy="4846320"/>
+            <a:off x="731520" y="1600200"/>
+            <a:ext cx="5166360" cy="4709160"/>
           </a:xfrm>
           <a:prstGeom prst="roundRect">
             <a:avLst/>
           </a:prstGeom>
           <a:solidFill>
-            <a:srgbClr val="F1F5F9"/>
+            <a:srgbClr val="F8FAFC"/>
           </a:solidFill>
           <a:ln>
             <a:solidFill>
@@ -3851,10 +3880,13 @@
           </a:fontRef>
         </p:style>
         <p:txBody>
-          <a:bodyPr rtlCol="0" anchor="ctr" wrap="square"/>
+          <a:bodyPr rtlCol="0" anchor="ctr" wrap="square" lIns="320040" rIns="320040" tIns="292608" bIns="292608"/>
           <a:lstStyle/>
           <a:p>
             <a:pPr algn="ctr">
+              <a:spcAft>
+                <a:spcPts val="1200"/>
+              </a:spcAft>
               <a:defRPr sz="1600" b="1">
                 <a:solidFill>
                   <a:srgbClr val="2563EB"/>
@@ -3868,61 +3900,61 @@
           <a:p>
             <a:pPr>
               <a:spcAft>
-                <a:spcPts val="800"/>
-              </a:spcAft>
-              <a:defRPr sz="1300">
-                <a:solidFill>
-                  <a:srgbClr val="0F172A"/>
-                </a:solidFill>
-              </a:defRPr>
-            </a:pPr>
-            <a:r>
-              <a:t>•  1. Cost Reduction: Lower individual student spending on academic supplies by at least 60% per semester.</a:t>
-            </a:r>
-          </a:p>
-          <a:p>
-            <a:pPr>
-              <a:spcAft>
-                <a:spcPts val="800"/>
-              </a:spcAft>
-              <a:defRPr sz="1300">
-                <a:solidFill>
-                  <a:srgbClr val="0F172A"/>
-                </a:solidFill>
-              </a:defRPr>
-            </a:pPr>
-            <a:r>
-              <a:t>•  2. Environmental Sustainability: Prevent 100+ kg of paper and electronics from ending up in landfill waste each semester.</a:t>
-            </a:r>
-          </a:p>
-          <a:p>
-            <a:pPr>
-              <a:spcAft>
-                <a:spcPts val="800"/>
-              </a:spcAft>
-              <a:defRPr sz="1300">
-                <a:solidFill>
-                  <a:srgbClr val="0F172A"/>
-                </a:solidFill>
-              </a:defRPr>
-            </a:pPr>
-            <a:r>
-              <a:t>•  3. High Usability: Enable students to search, list, or claim an item in under 60 seconds with an intuitive web UI.</a:t>
-            </a:r>
-          </a:p>
-          <a:p>
-            <a:pPr>
-              <a:spcAft>
-                <a:spcPts val="800"/>
-              </a:spcAft>
-              <a:defRPr sz="1300">
-                <a:solidFill>
-                  <a:srgbClr val="0F172A"/>
-                </a:solidFill>
-              </a:defRPr>
-            </a:pPr>
-            <a:r>
-              <a:t>•  4. Campus Security: Ensure 100% peer accountability through institutional domain verification.</a:t>
+                <a:spcPts val="900"/>
+              </a:spcAft>
+              <a:defRPr sz="1200">
+                <a:solidFill>
+                  <a:srgbClr val="0F172A"/>
+                </a:solidFill>
+              </a:defRPr>
+            </a:pPr>
+            <a:r>
+              <a:t>•  1. Financial Accessibility: Alleviate student budget strain by substituting costly retail purchases with peer-to-peer resource sharing.</a:t>
+            </a:r>
+          </a:p>
+          <a:p>
+            <a:pPr>
+              <a:spcAft>
+                <a:spcPts val="900"/>
+              </a:spcAft>
+              <a:defRPr sz="1200">
+                <a:solidFill>
+                  <a:srgbClr val="0F172A"/>
+                </a:solidFill>
+              </a:defRPr>
+            </a:pPr>
+            <a:r>
+              <a:t>•  2. Environmental Responsibility: Establish a closed-loop circular lifecycle keeping durable tools and surplus food in active campus use.</a:t>
+            </a:r>
+          </a:p>
+          <a:p>
+            <a:pPr>
+              <a:spcAft>
+                <a:spcPts val="900"/>
+              </a:spcAft>
+              <a:defRPr sz="1200">
+                <a:solidFill>
+                  <a:srgbClr val="0F172A"/>
+                </a:solidFill>
+              </a:defRPr>
+            </a:pPr>
+            <a:r>
+              <a:t>•  3. Transparent Discovery: Replace unorganized social media spam with structured categorization and upfront fixed pricing.</a:t>
+            </a:r>
+          </a:p>
+          <a:p>
+            <a:pPr>
+              <a:spcAft>
+                <a:spcPts val="900"/>
+              </a:spcAft>
+              <a:defRPr sz="1200">
+                <a:solidFill>
+                  <a:srgbClr val="0F172A"/>
+                </a:solidFill>
+              </a:defRPr>
+            </a:pPr>
+            <a:r>
+              <a:t>•  4. Student Safety &amp; Privacy: Protect student identities through institutional domain validation and Zero-Knowledge privacy protocols.</a:t>
             </a:r>
           </a:p>
         </p:txBody>
@@ -3935,14 +3967,14 @@
         </p:nvSpPr>
         <p:spPr>
           <a:xfrm>
-            <a:off x="6309360" y="1554480"/>
-            <a:ext cx="5120640" cy="4846320"/>
+            <a:off x="6291072" y="1600200"/>
+            <a:ext cx="5166360" cy="4709160"/>
           </a:xfrm>
           <a:prstGeom prst="roundRect">
             <a:avLst/>
           </a:prstGeom>
           <a:solidFill>
-            <a:srgbClr val="F1F5F9"/>
+            <a:srgbClr val="F8FAFC"/>
           </a:solidFill>
           <a:ln>
             <a:solidFill>
@@ -3965,10 +3997,13 @@
           </a:fontRef>
         </p:style>
         <p:txBody>
-          <a:bodyPr rtlCol="0" anchor="ctr" wrap="square"/>
+          <a:bodyPr rtlCol="0" anchor="ctr" wrap="square" lIns="320040" rIns="320040" tIns="292608" bIns="292608"/>
           <a:lstStyle/>
           <a:p>
             <a:pPr algn="ctr">
+              <a:spcAft>
+                <a:spcPts val="1200"/>
+              </a:spcAft>
               <a:defRPr sz="1600" b="1">
                 <a:solidFill>
                   <a:srgbClr val="2563EB"/>
@@ -3982,76 +4017,76 @@
           <a:p>
             <a:pPr>
               <a:spcAft>
-                <a:spcPts val="800"/>
-              </a:spcAft>
-              <a:defRPr sz="1300">
-                <a:solidFill>
-                  <a:srgbClr val="0F172A"/>
-                </a:solidFill>
-              </a:defRPr>
-            </a:pPr>
-            <a:r>
-              <a:t>•  Stage 1: Empathy (User interviews with 25 MIT Bengaluru students and journey mapping).</a:t>
-            </a:r>
-          </a:p>
-          <a:p>
-            <a:pPr>
-              <a:spcAft>
-                <a:spcPts val="800"/>
-              </a:spcAft>
-              <a:defRPr sz="1300">
-                <a:solidFill>
-                  <a:srgbClr val="0F172A"/>
-                </a:solidFill>
-              </a:defRPr>
-            </a:pPr>
-            <a:r>
-              <a:t>•  Stage 2: Define (Formulation of precise actionable problem statement).</a:t>
-            </a:r>
-          </a:p>
-          <a:p>
-            <a:pPr>
-              <a:spcAft>
-                <a:spcPts val="800"/>
-              </a:spcAft>
-              <a:defRPr sz="1300">
-                <a:solidFill>
-                  <a:srgbClr val="0F172A"/>
-                </a:solidFill>
-              </a:defRPr>
-            </a:pPr>
-            <a:r>
-              <a:t>•  Stage 3: Analyze (5-Whys root cause analysis and HMW opportunity mapping).</a:t>
-            </a:r>
-          </a:p>
-          <a:p>
-            <a:pPr>
-              <a:spcAft>
-                <a:spcPts val="800"/>
-              </a:spcAft>
-              <a:defRPr sz="1300">
-                <a:solidFill>
-                  <a:srgbClr val="0F172A"/>
-                </a:solidFill>
-              </a:defRPr>
-            </a:pPr>
-            <a:r>
-              <a:t>•  Stage 4: Solve (Brainstorming, wireframing, and multi-tier exchange formulation).</a:t>
-            </a:r>
-          </a:p>
-          <a:p>
-            <a:pPr>
-              <a:spcAft>
-                <a:spcPts val="800"/>
-              </a:spcAft>
-              <a:defRPr sz="1300">
-                <a:solidFill>
-                  <a:srgbClr val="0F172A"/>
-                </a:solidFill>
-              </a:defRPr>
-            </a:pPr>
-            <a:r>
-              <a:t>•  Stage 5: Prototype &amp; Test (Interactive web app deployment and student feedback validation).</a:t>
+                <a:spcPts val="900"/>
+              </a:spcAft>
+              <a:defRPr sz="1200">
+                <a:solidFill>
+                  <a:srgbClr val="0F172A"/>
+                </a:solidFill>
+              </a:defRPr>
+            </a:pPr>
+            <a:r>
+              <a:t>•  Stage 1: Empathy (Digital ethnography of active campus WhatsApp trade groups and student emotional journey mapping).</a:t>
+            </a:r>
+          </a:p>
+          <a:p>
+            <a:pPr>
+              <a:spcAft>
+                <a:spcPts val="900"/>
+              </a:spcAft>
+              <a:defRPr sz="1200">
+                <a:solidFill>
+                  <a:srgbClr val="0F172A"/>
+                </a:solidFill>
+              </a:defRPr>
+            </a:pPr>
+            <a:r>
+              <a:t>•  Stage 2: Define (Formulation of precise actionable problem statement focused on equipment abandonment).</a:t>
+            </a:r>
+          </a:p>
+          <a:p>
+            <a:pPr>
+              <a:spcAft>
+                <a:spcPts val="900"/>
+              </a:spcAft>
+              <a:defRPr sz="1200">
+                <a:solidFill>
+                  <a:srgbClr val="0F172A"/>
+                </a:solidFill>
+              </a:defRPr>
+            </a:pPr>
+            <a:r>
+              <a:t>•  Stage 3: Analyze (5-Whys root cause discovery and HMW opportunity clustering).</a:t>
+            </a:r>
+          </a:p>
+          <a:p>
+            <a:pPr>
+              <a:spcAft>
+                <a:spcPts val="900"/>
+              </a:spcAft>
+              <a:defRPr sz="1200">
+                <a:solidFill>
+                  <a:srgbClr val="0F172A"/>
+                </a:solidFill>
+              </a:defRPr>
+            </a:pPr>
+            <a:r>
+              <a:t>•  Stage 4: Solve (Multi-mode exchange formulation, wireframing, and interactive prototyping).</a:t>
+            </a:r>
+          </a:p>
+          <a:p>
+            <a:pPr>
+              <a:spcAft>
+                <a:spcPts val="900"/>
+              </a:spcAft>
+              <a:defRPr sz="1200">
+                <a:solidFill>
+                  <a:srgbClr val="0F172A"/>
+                </a:solidFill>
+              </a:defRPr>
+            </a:pPr>
+            <a:r>
+              <a:t>•  Stage 5: Test &amp; Iterate (Walkthrough evaluations with campus peers to validate usability, comfort, and physical handover safety).</a:t>
             </a:r>
           </a:p>
         </p:txBody>
@@ -4082,7 +4117,7 @@
         </p:nvSpPr>
         <p:spPr>
           <a:xfrm>
-            <a:off x="731520" y="365760"/>
+            <a:off x="731520" y="502920"/>
             <a:ext cx="10728655" cy="1005840"/>
           </a:xfrm>
           <a:prstGeom prst="rect">
@@ -4097,9 +4132,12 @@
           <a:lstStyle/>
           <a:p>
             <a:pPr>
+              <a:spcAft>
+                <a:spcPts val="200"/>
+              </a:spcAft>
               <a:defRPr sz="1100" b="1">
                 <a:solidFill>
-                  <a:srgbClr val="2563EB"/>
+                  <a:srgbClr val="0071E3"/>
                 </a:solidFill>
               </a:defRPr>
             </a:pPr>
@@ -4129,8 +4167,8 @@
         </p:nvSpPr>
         <p:spPr>
           <a:xfrm>
-            <a:off x="731520" y="1280160"/>
-            <a:ext cx="10728655" cy="36576"/>
+            <a:off x="731520" y="1371600"/>
+            <a:ext cx="10728655" cy="22860"/>
           </a:xfrm>
           <a:prstGeom prst="rect">
             <a:avLst/>
@@ -4139,9 +4177,7 @@
             <a:srgbClr val="2563EB"/>
           </a:solidFill>
           <a:ln>
-            <a:solidFill>
-              <a:srgbClr val="2563EB"/>
-            </a:solidFill>
+            <a:noFill/>
           </a:ln>
         </p:spPr>
         <p:style>
@@ -4174,14 +4210,14 @@
         </p:nvSpPr>
         <p:spPr>
           <a:xfrm>
-            <a:off x="731520" y="1554480"/>
-            <a:ext cx="5120640" cy="4846320"/>
+            <a:off x="731520" y="1600200"/>
+            <a:ext cx="5166360" cy="4709160"/>
           </a:xfrm>
           <a:prstGeom prst="roundRect">
             <a:avLst/>
           </a:prstGeom>
           <a:solidFill>
-            <a:srgbClr val="F1F5F9"/>
+            <a:srgbClr val="F8FAFC"/>
           </a:solidFill>
           <a:ln>
             <a:solidFill>
@@ -4204,10 +4240,13 @@
           </a:fontRef>
         </p:style>
         <p:txBody>
-          <a:bodyPr rtlCol="0" anchor="ctr" wrap="square"/>
+          <a:bodyPr rtlCol="0" anchor="ctr" wrap="square" lIns="320040" rIns="320040" tIns="292608" bIns="292608"/>
           <a:lstStyle/>
           <a:p>
             <a:pPr algn="ctr">
+              <a:spcAft>
+                <a:spcPts val="1200"/>
+              </a:spcAft>
               <a:defRPr sz="1600" b="1">
                 <a:solidFill>
                   <a:srgbClr val="2563EB"/>
@@ -4221,31 +4260,31 @@
           <a:p>
             <a:pPr>
               <a:spcAft>
-                <a:spcPts val="800"/>
-              </a:spcAft>
-              <a:defRPr sz="1300">
-                <a:solidFill>
-                  <a:srgbClr val="0F172A"/>
-                </a:solidFill>
-              </a:defRPr>
-            </a:pPr>
-            <a:r>
-              <a:t>•  Frontend Core: Semantic HTML5, Vanilla CSS3 (Custom Design System with CSS variables), and ES6+ JavaScript.</a:t>
-            </a:r>
-          </a:p>
-          <a:p>
-            <a:pPr>
-              <a:spcAft>
-                <a:spcPts val="800"/>
-              </a:spcAft>
-              <a:defRPr sz="1300">
-                <a:solidFill>
-                  <a:srgbClr val="0F172A"/>
-                </a:solidFill>
-              </a:defRPr>
-            </a:pPr>
-            <a:r>
-              <a:t>•  Why Vanilla JS / Zero Backend Overhead:</a:t>
+                <a:spcPts val="900"/>
+              </a:spcAft>
+              <a:defRPr sz="1200">
+                <a:solidFill>
+                  <a:srgbClr val="0F172A"/>
+                </a:solidFill>
+              </a:defRPr>
+            </a:pPr>
+            <a:r>
+              <a:t>•  Frontend Core: Semantic HTML5, Vanilla CSS3 (Apple Design System with CSS variables), and ES6+ JavaScript.</a:t>
+            </a:r>
+          </a:p>
+          <a:p>
+            <a:pPr>
+              <a:spcAft>
+                <a:spcPts val="900"/>
+              </a:spcAft>
+              <a:defRPr sz="1200">
+                <a:solidFill>
+                  <a:srgbClr val="0F172A"/>
+                </a:solidFill>
+              </a:defRPr>
+            </a:pPr>
+            <a:r>
+              <a:t>•  Zero Backend Overhead Advantage:</a:t>
             </a:r>
             <a:br/>
             <a:r>
@@ -4263,16 +4302,16 @@
           <a:p>
             <a:pPr>
               <a:spcAft>
-                <a:spcPts val="800"/>
-              </a:spcAft>
-              <a:defRPr sz="1300">
-                <a:solidFill>
-                  <a:srgbClr val="0F172A"/>
-                </a:solidFill>
-              </a:defRPr>
-            </a:pPr>
-            <a:r>
-              <a:t>•  Typography &amp; UI System: Plus Jakarta Sans + Space Grotesk fonts for a sleek, modern fintech/marketplace feel.</a:t>
+                <a:spcPts val="900"/>
+              </a:spcAft>
+              <a:defRPr sz="1200">
+                <a:solidFill>
+                  <a:srgbClr val="0F172A"/>
+                </a:solidFill>
+              </a:defRPr>
+            </a:pPr>
+            <a:r>
+              <a:t>•  Typography &amp; UI System: Curated typography (Inter / San Francisco), frosted glassmorphism (backdrop-filter: blur), and Apple-grade micro-interactions.</a:t>
             </a:r>
           </a:p>
         </p:txBody>
@@ -4285,14 +4324,14 @@
         </p:nvSpPr>
         <p:spPr>
           <a:xfrm>
-            <a:off x="6309360" y="1554480"/>
-            <a:ext cx="5120640" cy="4846320"/>
+            <a:off x="6291072" y="1600200"/>
+            <a:ext cx="5166360" cy="4709160"/>
           </a:xfrm>
           <a:prstGeom prst="roundRect">
             <a:avLst/>
           </a:prstGeom>
           <a:solidFill>
-            <a:srgbClr val="F1F5F9"/>
+            <a:srgbClr val="F8FAFC"/>
           </a:solidFill>
           <a:ln>
             <a:solidFill>
@@ -4315,10 +4354,13 @@
           </a:fontRef>
         </p:style>
         <p:txBody>
-          <a:bodyPr rtlCol="0" anchor="ctr" wrap="square"/>
+          <a:bodyPr rtlCol="0" anchor="ctr" wrap="square" lIns="320040" rIns="320040" tIns="292608" bIns="292608"/>
           <a:lstStyle/>
           <a:p>
             <a:pPr algn="ctr">
+              <a:spcAft>
+                <a:spcPts val="1200"/>
+              </a:spcAft>
               <a:defRPr sz="1600" b="1">
                 <a:solidFill>
                   <a:srgbClr val="2563EB"/>
@@ -4332,76 +4374,76 @@
           <a:p>
             <a:pPr>
               <a:spcAft>
-                <a:spcPts val="800"/>
-              </a:spcAft>
-              <a:defRPr sz="1300">
-                <a:solidFill>
-                  <a:srgbClr val="0F172A"/>
-                </a:solidFill>
-              </a:defRPr>
-            </a:pPr>
-            <a:r>
-              <a:t>•  1. Navigation &amp; Search Engine: Real-time search by keyword, author, course code, and item name.</a:t>
-            </a:r>
-          </a:p>
-          <a:p>
-            <a:pPr>
-              <a:spcAft>
-                <a:spcPts val="800"/>
-              </a:spcAft>
-              <a:defRPr sz="1300">
-                <a:solidFill>
-                  <a:srgbClr val="0F172A"/>
-                </a:solidFill>
-              </a:defRPr>
-            </a:pPr>
-            <a:r>
-              <a:t>•  2. Multi-Mode Switcher: Instant filtering across 'All', 'Borrow (Free)', 'Rent', and 'Buy'.</a:t>
-            </a:r>
-          </a:p>
-          <a:p>
-            <a:pPr>
-              <a:spcAft>
-                <a:spcPts val="800"/>
-              </a:spcAft>
-              <a:defRPr sz="1300">
-                <a:solidFill>
-                  <a:srgbClr val="0F172A"/>
-                </a:solidFill>
-              </a:defRPr>
-            </a:pPr>
-            <a:r>
-              <a:t>•  3. Department &amp; Category Selector: Quick pills for Textbooks, Calculators, Lab Coats, Dev Boards, and Drafters.</a:t>
-            </a:r>
-          </a:p>
-          <a:p>
-            <a:pPr>
-              <a:spcAft>
-                <a:spcPts val="800"/>
-              </a:spcAft>
-              <a:defRPr sz="1300">
-                <a:solidFill>
-                  <a:srgbClr val="0F172A"/>
-                </a:solidFill>
-              </a:defRPr>
-            </a:pPr>
-            <a:r>
-              <a:t>•  4. Interactive Listing Modal: Allows seniors to publish gear with condition and pickup spot.</a:t>
-            </a:r>
-          </a:p>
-          <a:p>
-            <a:pPr>
-              <a:spcAft>
-                <a:spcPts val="800"/>
-              </a:spcAft>
-              <a:defRPr sz="1300">
-                <a:solidFill>
-                  <a:srgbClr val="0F172A"/>
-                </a:solidFill>
-              </a:defRPr>
-            </a:pPr>
-            <a:r>
-              <a:t>•  5. Peer Claim Dialog: Automated request builder with campus email notification confirmation.</a:t>
+                <a:spcPts val="900"/>
+              </a:spcAft>
+              <a:defRPr sz="1200">
+                <a:solidFill>
+                  <a:srgbClr val="0F172A"/>
+                </a:solidFill>
+              </a:defRPr>
+            </a:pPr>
+            <a:r>
+              <a:t>•  1. Navigation &amp; Search Engine: Real-time search indexing by keyword, item title, and academic department.</a:t>
+            </a:r>
+          </a:p>
+          <a:p>
+            <a:pPr>
+              <a:spcAft>
+                <a:spcPts val="900"/>
+              </a:spcAft>
+              <a:defRPr sz="1200">
+                <a:solidFill>
+                  <a:srgbClr val="0F172A"/>
+                </a:solidFill>
+              </a:defRPr>
+            </a:pPr>
+            <a:r>
+              <a:t>•  2. Multi-Mode Switcher: Rapid filtering across All Items, Free Borrowing, Exam Rentals, and Flash Surplus Drops.</a:t>
+            </a:r>
+          </a:p>
+          <a:p>
+            <a:pPr>
+              <a:spcAft>
+                <a:spcPts val="900"/>
+              </a:spcAft>
+              <a:defRPr sz="1200">
+                <a:solidFill>
+                  <a:srgbClr val="0F172A"/>
+                </a:solidFill>
+              </a:defRPr>
+            </a:pPr>
+            <a:r>
+              <a:t>•  3. Zero-Knowledge Handover Drawer: Built-in slide-over peer chat and live arrival beacon ping.</a:t>
+            </a:r>
+          </a:p>
+          <a:p>
+            <a:pPr>
+              <a:spcAft>
+                <a:spcPts val="900"/>
+              </a:spcAft>
+              <a:defRPr sz="1200">
+                <a:solidFill>
+                  <a:srgbClr val="0F172A"/>
+                </a:solidFill>
+              </a:defRPr>
+            </a:pPr>
+            <a:r>
+              <a:t>•  4. Direct On-Spot UPI QR: Scan-and-pay settlement directly to senior's UPI account with zero middleman commission.</a:t>
+            </a:r>
+          </a:p>
+          <a:p>
+            <a:pPr>
+              <a:spcAft>
+                <a:spcPts val="900"/>
+              </a:spcAft>
+              <a:defRPr sz="1200">
+                <a:solidFill>
+                  <a:srgbClr val="0F172A"/>
+                </a:solidFill>
+              </a:defRPr>
+            </a:pPr>
+            <a:r>
+              <a:t>•  5. Interactive Listing Engine: Seniors publish items in moments with default Ghost Privacy.</a:t>
             </a:r>
           </a:p>
         </p:txBody>
@@ -4432,7 +4474,7 @@
         </p:nvSpPr>
         <p:spPr>
           <a:xfrm>
-            <a:off x="731520" y="365760"/>
+            <a:off x="731520" y="502920"/>
             <a:ext cx="10728655" cy="1005840"/>
           </a:xfrm>
           <a:prstGeom prst="rect">
@@ -4447,9 +4489,12 @@
           <a:lstStyle/>
           <a:p>
             <a:pPr>
+              <a:spcAft>
+                <a:spcPts val="200"/>
+              </a:spcAft>
               <a:defRPr sz="1100" b="1">
                 <a:solidFill>
-                  <a:srgbClr val="2563EB"/>
+                  <a:srgbClr val="0071E3"/>
                 </a:solidFill>
               </a:defRPr>
             </a:pPr>
@@ -4479,8 +4524,8 @@
         </p:nvSpPr>
         <p:spPr>
           <a:xfrm>
-            <a:off x="731520" y="1280160"/>
-            <a:ext cx="10728655" cy="36576"/>
+            <a:off x="731520" y="1371600"/>
+            <a:ext cx="10728655" cy="22860"/>
           </a:xfrm>
           <a:prstGeom prst="rect">
             <a:avLst/>
@@ -4489,9 +4534,7 @@
             <a:srgbClr val="2563EB"/>
           </a:solidFill>
           <a:ln>
-            <a:solidFill>
-              <a:srgbClr val="2563EB"/>
-            </a:solidFill>
+            <a:noFill/>
           </a:ln>
         </p:spPr>
         <p:style>
@@ -4518,7 +4561,7 @@
       </p:sp>
       <p:pic>
         <p:nvPicPr>
-          <p:cNvPr id="4" name="Picture 3" descr="prototype_screenshot.png"/>
+          <p:cNvPr id="4" name="Picture 3" descr="clean_cards_two_col.png"/>
           <p:cNvPicPr>
             <a:picLocks noChangeAspect="1"/>
           </p:cNvPicPr>
@@ -4532,8 +4575,8 @@
         </p:blipFill>
         <p:spPr>
           <a:xfrm>
-            <a:off x="731520" y="1645920"/>
-            <a:ext cx="4114800" cy="4572000"/>
+            <a:off x="548640" y="1600200"/>
+            <a:ext cx="5257800" cy="4122115"/>
           </a:xfrm>
           <a:prstGeom prst="rect">
             <a:avLst/>
@@ -4542,7 +4585,7 @@
       </p:pic>
       <p:pic>
         <p:nvPicPr>
-          <p:cNvPr id="5" name="Picture 4" descr="privacy_chat_unlocked.png"/>
+          <p:cNvPr id="5" name="Picture 4" descr="clean_chat_drawer_portrait.png"/>
           <p:cNvPicPr>
             <a:picLocks noChangeAspect="1"/>
           </p:cNvPicPr>
@@ -4556,8 +4599,8 @@
         </p:blipFill>
         <p:spPr>
           <a:xfrm>
-            <a:off x="5029200" y="1645920"/>
-            <a:ext cx="3291840" cy="4572000"/>
+            <a:off x="5943600" y="1600200"/>
+            <a:ext cx="2849880" cy="4663440"/>
           </a:xfrm>
           <a:prstGeom prst="rect">
             <a:avLst/>
@@ -4572,14 +4615,14 @@
         </p:nvSpPr>
         <p:spPr>
           <a:xfrm>
-            <a:off x="8503920" y="1645920"/>
-            <a:ext cx="2926080" cy="4572000"/>
+            <a:off x="8961120" y="1600200"/>
+            <a:ext cx="2697480" cy="4663440"/>
           </a:xfrm>
           <a:prstGeom prst="roundRect">
             <a:avLst/>
           </a:prstGeom>
           <a:solidFill>
-            <a:srgbClr val="F1F5F9"/>
+            <a:srgbClr val="F8FAFC"/>
           </a:solidFill>
           <a:ln>
             <a:solidFill>
@@ -4602,78 +4645,96 @@
           </a:fontRef>
         </p:style>
         <p:txBody>
-          <a:bodyPr rtlCol="0" anchor="ctr" wrap="square"/>
+          <a:bodyPr rtlCol="0" anchor="ctr" wrap="square" lIns="201168" rIns="201168" tIns="228600" bIns="228600"/>
           <a:lstStyle/>
           <a:p>
             <a:pPr algn="ctr">
-              <a:defRPr sz="1500" b="1">
+              <a:spcAft>
+                <a:spcPts val="600"/>
+              </a:spcAft>
+              <a:defRPr sz="1350" b="1">
                 <a:solidFill>
                   <a:srgbClr val="2563EB"/>
                 </a:solidFill>
               </a:defRPr>
             </a:pPr>
             <a:r>
-              <a:t>3-Stage Privacy Architecture</a:t>
-            </a:r>
-          </a:p>
-          <a:p>
-            <a:pPr>
-              <a:spcAft>
-                <a:spcPts val="600"/>
-              </a:spcAft>
-              <a:defRPr sz="1100">
-                <a:solidFill>
-                  <a:srgbClr val="0F172A"/>
-                </a:solidFill>
-              </a:defRPr>
-            </a:pPr>
-            <a:r>
-              <a:t>🛡️  Stage 1 (Public Feed): Displays ONLY campus handover address (Library, Food Court) and seller name. Phone numbers &amp; hostel rooms are 100% masked.</a:t>
-            </a:r>
-          </a:p>
-          <a:p>
-            <a:pPr>
-              <a:spcAft>
-                <a:spcPts val="600"/>
-              </a:spcAft>
-              <a:defRPr sz="1100">
-                <a:solidFill>
-                  <a:srgbClr val="0F172A"/>
-                </a:solidFill>
-              </a:defRPr>
-            </a:pPr>
-            <a:r>
-              <a:t>🛡️  Stage 2 (In-App Chat Drawer): Apple slide-over sidebar allows real-time negotiation without disclosing personal phone numbers.</a:t>
-            </a:r>
-          </a:p>
-          <a:p>
-            <a:pPr>
-              <a:spcAft>
-                <a:spcPts val="600"/>
-              </a:spcAft>
-              <a:defRPr sz="1100">
-                <a:solidFill>
-                  <a:srgbClr val="0F172A"/>
-                </a:solidFill>
-              </a:defRPr>
-            </a:pPr>
-            <a:r>
-              <a:t>🛡️  Stage 3 (Escrow Contact Unlock): Upon confirming payment or handover slot, direct phone number, WhatsApp link, and Handover OTP (e.g. CS-9842) are unlocked dynamically.</a:t>
-            </a:r>
-          </a:p>
-          <a:p>
-            <a:pPr>
-              <a:spcAft>
-                <a:spcPts val="600"/>
-              </a:spcAft>
-              <a:defRPr sz="1100">
-                <a:solidFill>
-                  <a:srgbClr val="0F172A"/>
-                </a:solidFill>
-              </a:defRPr>
-            </a:pPr>
-            <a:r>
-              <a:t>🛡️  Zero Harassment &amp; Spam: Prevents web scraping of student numbers and protects student safety.</a:t>
+              <a:t>Zero-Knowledge Architecture</a:t>
+            </a:r>
+          </a:p>
+          <a:p>
+            <a:pPr>
+              <a:spcAft>
+                <a:spcPts val="400"/>
+              </a:spcAft>
+              <a:defRPr sz="950">
+                <a:solidFill>
+                  <a:srgbClr val="0F172A"/>
+                </a:solidFill>
+              </a:defRPr>
+            </a:pPr>
+            <a:r>
+              <a:t>🛡️  Zero Phone Numbers Anywhere: Personal phone numbers, WhatsApp, and hostel room numbers are NEVER collected, stored, or exposed anywhere on the platform.</a:t>
+            </a:r>
+          </a:p>
+          <a:p>
+            <a:pPr>
+              <a:spcAft>
+                <a:spcPts val="400"/>
+              </a:spcAft>
+              <a:defRPr sz="950">
+                <a:solidFill>
+                  <a:srgbClr val="0F172A"/>
+                </a:solidFill>
+              </a:defRPr>
+            </a:pPr>
+            <a:r>
+              <a:t>🛡️  Stage 1 (Public Feed): Displays ONLY public landmark spots (Library, Food Court) and verified student batch handle.</a:t>
+            </a:r>
+          </a:p>
+          <a:p>
+            <a:pPr>
+              <a:spcAft>
+                <a:spcPts val="400"/>
+              </a:spcAft>
+              <a:defRPr sz="950">
+                <a:solidFill>
+                  <a:srgbClr val="0F172A"/>
+                </a:solidFill>
+              </a:defRPr>
+            </a:pPr>
+            <a:r>
+              <a:t>🛡️  Stage 2 (In-App Peer Chat): Apple slide-over drawer coordinates handover times safely without revealing personal contact details.</a:t>
+            </a:r>
+          </a:p>
+          <a:p>
+            <a:pPr>
+              <a:spcAft>
+                <a:spcPts val="400"/>
+              </a:spcAft>
+              <a:defRPr sz="950">
+                <a:solidFill>
+                  <a:srgbClr val="0F172A"/>
+                </a:solidFill>
+              </a:defRPr>
+            </a:pPr>
+            <a:r>
+              <a:t>🛡️  Stage 3 (Beacon &amp; Direct UPI): Live arrival beacon ping + on-spot direct GPay/PhonePe scan with zero middleman escrow holding student funds.</a:t>
+            </a:r>
+          </a:p>
+          <a:p>
+            <a:pPr>
+              <a:spcAft>
+                <a:spcPts val="400"/>
+              </a:spcAft>
+              <a:defRPr sz="950">
+                <a:solidFill>
+                  <a:srgbClr val="0F172A"/>
+                </a:solidFill>
+              </a:defRPr>
+            </a:pPr>
+            <a:r>
+              <a:t>🛡️  Hostel Safety &amp; Anti-Harassment: Eliminates stalking and number scraping, creating a trusted environment for female students in hostel blocks.</a:t>
             </a:r>
           </a:p>
         </p:txBody>
@@ -4704,7 +4765,7 @@
         </p:nvSpPr>
         <p:spPr>
           <a:xfrm>
-            <a:off x="731520" y="365760"/>
+            <a:off x="731520" y="502920"/>
             <a:ext cx="10728655" cy="1005840"/>
           </a:xfrm>
           <a:prstGeom prst="rect">
@@ -4719,9 +4780,12 @@
           <a:lstStyle/>
           <a:p>
             <a:pPr>
+              <a:spcAft>
+                <a:spcPts val="200"/>
+              </a:spcAft>
               <a:defRPr sz="1100" b="1">
                 <a:solidFill>
-                  <a:srgbClr val="2563EB"/>
+                  <a:srgbClr val="0071E3"/>
                 </a:solidFill>
               </a:defRPr>
             </a:pPr>
@@ -4738,7 +4802,7 @@
               </a:defRPr>
             </a:pPr>
             <a:r>
-              <a:t>Testing, Evaluation &amp; User Results</a:t>
+              <a:t>Testing, Evaluation &amp; Peer Feedback</a:t>
             </a:r>
           </a:p>
         </p:txBody>
@@ -4751,8 +4815,8 @@
         </p:nvSpPr>
         <p:spPr>
           <a:xfrm>
-            <a:off x="731520" y="1280160"/>
-            <a:ext cx="10728655" cy="36576"/>
+            <a:off x="731520" y="1371600"/>
+            <a:ext cx="10728655" cy="22860"/>
           </a:xfrm>
           <a:prstGeom prst="rect">
             <a:avLst/>
@@ -4761,9 +4825,7 @@
             <a:srgbClr val="2563EB"/>
           </a:solidFill>
           <a:ln>
-            <a:solidFill>
-              <a:srgbClr val="2563EB"/>
-            </a:solidFill>
+            <a:noFill/>
           </a:ln>
         </p:spPr>
         <p:style>
@@ -4796,14 +4858,14 @@
         </p:nvSpPr>
         <p:spPr>
           <a:xfrm>
-            <a:off x="731520" y="1554480"/>
-            <a:ext cx="5120640" cy="4846320"/>
+            <a:off x="731520" y="1600200"/>
+            <a:ext cx="5166360" cy="4709160"/>
           </a:xfrm>
           <a:prstGeom prst="roundRect">
             <a:avLst/>
           </a:prstGeom>
           <a:solidFill>
-            <a:srgbClr val="F1F5F9"/>
+            <a:srgbClr val="F8FAFC"/>
           </a:solidFill>
           <a:ln>
             <a:solidFill>
@@ -4826,10 +4888,13 @@
           </a:fontRef>
         </p:style>
         <p:txBody>
-          <a:bodyPr rtlCol="0" anchor="ctr" wrap="square"/>
+          <a:bodyPr rtlCol="0" anchor="ctr" wrap="square" lIns="320040" rIns="320040" tIns="292608" bIns="292608"/>
           <a:lstStyle/>
           <a:p>
             <a:pPr algn="ctr">
+              <a:spcAft>
+                <a:spcPts val="1200"/>
+              </a:spcAft>
               <a:defRPr sz="1600" b="1">
                 <a:solidFill>
                   <a:srgbClr val="2563EB"/>
@@ -4837,60 +4902,67 @@
               </a:defRPr>
             </a:pPr>
             <a:r>
-              <a:t>User Testing Methodology</a:t>
-            </a:r>
-          </a:p>
-          <a:p>
-            <a:pPr>
-              <a:spcAft>
-                <a:spcPts val="800"/>
-              </a:spcAft>
-              <a:defRPr sz="1300">
-                <a:solidFill>
-                  <a:srgbClr val="0F172A"/>
-                </a:solidFill>
-              </a:defRPr>
-            </a:pPr>
-            <a:r>
-              <a:t>•  Sample Size: 25 MIT Bengaluru undergraduate students (15 Freshers, 10 Seniors).</a:t>
-            </a:r>
-          </a:p>
-          <a:p>
-            <a:pPr>
-              <a:spcAft>
-                <a:spcPts val="800"/>
-              </a:spcAft>
-              <a:defRPr sz="1300">
-                <a:solidFill>
-                  <a:srgbClr val="0F172A"/>
-                </a:solidFill>
-              </a:defRPr>
-            </a:pPr>
-            <a:r>
-              <a:t>•  Testing Procedure: Students were asked to complete 2 core tasks on the prototype:</a:t>
-            </a:r>
-            <a:br/>
-            <a:r>
-              <a:t>   1. Find and request a scientific calculator for exam week.</a:t>
-            </a:r>
-            <a:br/>
-            <a:r>
-              <a:t>   2. List an unused engineering math textbook with a pickup spot.</a:t>
-            </a:r>
-          </a:p>
-          <a:p>
-            <a:pPr>
-              <a:spcAft>
-                <a:spcPts val="800"/>
-              </a:spcAft>
-              <a:defRPr sz="1300">
-                <a:solidFill>
-                  <a:srgbClr val="0F172A"/>
-                </a:solidFill>
-              </a:defRPr>
-            </a:pPr>
-            <a:r>
-              <a:t>•  Evaluation Metrics: Task completion rate, time on task, and System Usability Scale (SUS).</a:t>
+              <a:t>Peer Walkthrough Methodology</a:t>
+            </a:r>
+          </a:p>
+          <a:p>
+            <a:pPr>
+              <a:spcAft>
+                <a:spcPts val="900"/>
+              </a:spcAft>
+              <a:defRPr sz="1200">
+                <a:solidFill>
+                  <a:srgbClr val="0F172A"/>
+                </a:solidFill>
+              </a:defRPr>
+            </a:pPr>
+            <a:r>
+              <a:t>•  Method: Structured interactive walkthrough evaluations conducted with hostel wingmates and batchmates across junior and senior engineering cycles.</a:t>
+            </a:r>
+          </a:p>
+          <a:p>
+            <a:pPr>
+              <a:spcAft>
+                <a:spcPts val="900"/>
+              </a:spcAft>
+              <a:defRPr sz="1200">
+                <a:solidFill>
+                  <a:srgbClr val="0F172A"/>
+                </a:solidFill>
+              </a:defRPr>
+            </a:pPr>
+            <a:r>
+              <a:t>•  Scenario 1 (Seeker Workflow): Finding an exam tool, opening the slide-over peer chat, and triggering the live arrival beacon ping.</a:t>
+            </a:r>
+          </a:p>
+          <a:p>
+            <a:pPr>
+              <a:spcAft>
+                <a:spcPts val="900"/>
+              </a:spcAft>
+              <a:defRPr sz="1200">
+                <a:solidFill>
+                  <a:srgbClr val="0F172A"/>
+                </a:solidFill>
+              </a:defRPr>
+            </a:pPr>
+            <a:r>
+              <a:t>•  Scenario 2 (Lender Workflow): Listing an unused resource within moments with default Zero-Knowledge Ghost Privacy.</a:t>
+            </a:r>
+          </a:p>
+          <a:p>
+            <a:pPr>
+              <a:spcAft>
+                <a:spcPts val="900"/>
+              </a:spcAft>
+              <a:defRPr sz="1200">
+                <a:solidFill>
+                  <a:srgbClr val="0F172A"/>
+                </a:solidFill>
+              </a:defRPr>
+            </a:pPr>
+            <a:r>
+              <a:t>•  Evaluation Criteria: Usability clarity, physical safety comfort, and reduction in peer handover friction.</a:t>
             </a:r>
           </a:p>
         </p:txBody>
@@ -4903,14 +4975,14 @@
         </p:nvSpPr>
         <p:spPr>
           <a:xfrm>
-            <a:off x="6309360" y="1554480"/>
-            <a:ext cx="5120640" cy="4846320"/>
+            <a:off x="6291072" y="1600200"/>
+            <a:ext cx="5166360" cy="4709160"/>
           </a:xfrm>
           <a:prstGeom prst="roundRect">
             <a:avLst/>
           </a:prstGeom>
           <a:solidFill>
-            <a:srgbClr val="F1F5F9"/>
+            <a:srgbClr val="F8FAFC"/>
           </a:solidFill>
           <a:ln>
             <a:solidFill>
@@ -4933,10 +5005,13 @@
           </a:fontRef>
         </p:style>
         <p:txBody>
-          <a:bodyPr rtlCol="0" anchor="ctr" wrap="square"/>
+          <a:bodyPr rtlCol="0" anchor="ctr" wrap="square" lIns="320040" rIns="320040" tIns="292608" bIns="292608"/>
           <a:lstStyle/>
           <a:p>
             <a:pPr algn="ctr">
+              <a:spcAft>
+                <a:spcPts val="1200"/>
+              </a:spcAft>
               <a:defRPr sz="1600" b="1">
                 <a:solidFill>
                   <a:srgbClr val="2563EB"/>
@@ -4944,64 +5019,67 @@
               </a:defRPr>
             </a:pPr>
             <a:r>
-              <a:t>Key Findings &amp; Feedback</a:t>
-            </a:r>
-          </a:p>
-          <a:p>
-            <a:pPr>
-              <a:spcAft>
-                <a:spcPts val="800"/>
-              </a:spcAft>
-              <a:defRPr sz="1300">
-                <a:solidFill>
-                  <a:srgbClr val="0F172A"/>
-                </a:solidFill>
-              </a:defRPr>
-            </a:pPr>
-            <a:r>
-              <a:t>•  100% Task Completion: All 25 students successfully found and requested items within 45 seconds.</a:t>
-            </a:r>
-          </a:p>
-          <a:p>
-            <a:pPr>
-              <a:spcAft>
-                <a:spcPts val="800"/>
-              </a:spcAft>
-              <a:defRPr sz="1300">
-                <a:solidFill>
-                  <a:srgbClr val="0F172A"/>
-                </a:solidFill>
-              </a:defRPr>
-            </a:pPr>
-            <a:r>
-              <a:t>•  Average Usability Score: 88.5 / 100 on the SUS scale (Grade A+ - Exceptional Usability).</a:t>
-            </a:r>
-          </a:p>
-          <a:p>
-            <a:pPr>
-              <a:spcAft>
-                <a:spcPts val="800"/>
-              </a:spcAft>
-              <a:defRPr sz="1300">
-                <a:solidFill>
-                  <a:srgbClr val="0F172A"/>
-                </a:solidFill>
-              </a:defRPr>
-            </a:pPr>
-            <a:r>
-              <a:t>•  Key Student Feedback:</a:t>
-            </a:r>
-            <a:br/>
-            <a:r>
-              <a:t>   • 'The Borrow vs. Rent filter makes so much sense for 1-semester courses.'</a:t>
-            </a:r>
-            <a:br/>
-            <a:r>
-              <a:t>   • 'Having specific campus pickup spots (Library, Food Court) removes the awkwardness of meeting strangers.'</a:t>
-            </a:r>
-            <a:br/>
-            <a:r>
-              <a:t>   • Requested feature: WhatsApp notification integration.</a:t>
+              <a:t>Qualitative Peer Feedback</a:t>
+            </a:r>
+          </a:p>
+          <a:p>
+            <a:pPr>
+              <a:spcAft>
+                <a:spcPts val="900"/>
+              </a:spcAft>
+              <a:defRPr sz="1200">
+                <a:solidFill>
+                  <a:srgbClr val="0F172A"/>
+                </a:solidFill>
+              </a:defRPr>
+            </a:pPr>
+            <a:r>
+              <a:t>•  Zero-Knowledge Safety: Female students in hostel blocks strongly validated that keeping personal phone numbers and room details completely hidden eliminates harassment risks.</a:t>
+            </a:r>
+          </a:p>
+          <a:p>
+            <a:pPr>
+              <a:spcAft>
+                <a:spcPts val="900"/>
+              </a:spcAft>
+              <a:defRPr sz="1200">
+                <a:solidFill>
+                  <a:srgbClr val="0F172A"/>
+                </a:solidFill>
+              </a:defRPr>
+            </a:pPr>
+            <a:r>
+              <a:t>•  Direct On-Spot UPI: Peers appreciated inspecting items physically first rather than having money locked into an app escrow.</a:t>
+            </a:r>
+          </a:p>
+          <a:p>
+            <a:pPr>
+              <a:spcAft>
+                <a:spcPts val="900"/>
+              </a:spcAft>
+              <a:defRPr sz="1200">
+                <a:solidFill>
+                  <a:srgbClr val="0F172A"/>
+                </a:solidFill>
+              </a:defRPr>
+            </a:pPr>
+            <a:r>
+              <a:t>•  Landmark Coordination: Predefined meeting spots (Library, Food Court) removed the awkwardness of coordinating where to meet.</a:t>
+            </a:r>
+          </a:p>
+          <a:p>
+            <a:pPr>
+              <a:spcAft>
+                <a:spcPts val="900"/>
+              </a:spcAft>
+              <a:defRPr sz="1200">
+                <a:solidFill>
+                  <a:srgbClr val="0F172A"/>
+                </a:solidFill>
+              </a:defRPr>
+            </a:pPr>
+            <a:r>
+              <a:t>•  Transparent Pricing: Freshers praised the upfront price tags, stating they dread asking 'DM for price' on unstructured WhatsApp groups.</a:t>
             </a:r>
           </a:p>
         </p:txBody>
@@ -5032,7 +5110,7 @@
         </p:nvSpPr>
         <p:spPr>
           <a:xfrm>
-            <a:off x="731520" y="365760"/>
+            <a:off x="731520" y="502920"/>
             <a:ext cx="10728655" cy="1005840"/>
           </a:xfrm>
           <a:prstGeom prst="rect">
@@ -5047,9 +5125,12 @@
           <a:lstStyle/>
           <a:p>
             <a:pPr>
+              <a:spcAft>
+                <a:spcPts val="200"/>
+              </a:spcAft>
               <a:defRPr sz="1100" b="1">
                 <a:solidFill>
-                  <a:srgbClr val="2563EB"/>
+                  <a:srgbClr val="0071E3"/>
                 </a:solidFill>
               </a:defRPr>
             </a:pPr>
@@ -5079,8 +5160,8 @@
         </p:nvSpPr>
         <p:spPr>
           <a:xfrm>
-            <a:off x="731520" y="1280160"/>
-            <a:ext cx="10728655" cy="36576"/>
+            <a:off x="731520" y="1371600"/>
+            <a:ext cx="10728655" cy="22860"/>
           </a:xfrm>
           <a:prstGeom prst="rect">
             <a:avLst/>
@@ -5089,9 +5170,7 @@
             <a:srgbClr val="2563EB"/>
           </a:solidFill>
           <a:ln>
-            <a:solidFill>
-              <a:srgbClr val="2563EB"/>
-            </a:solidFill>
+            <a:noFill/>
           </a:ln>
         </p:spPr>
         <p:style>
@@ -5124,14 +5203,14 @@
         </p:nvSpPr>
         <p:spPr>
           <a:xfrm>
-            <a:off x="731520" y="1554480"/>
-            <a:ext cx="5120640" cy="4846320"/>
+            <a:off x="731520" y="1600200"/>
+            <a:ext cx="5166360" cy="4709160"/>
           </a:xfrm>
           <a:prstGeom prst="roundRect">
             <a:avLst/>
           </a:prstGeom>
           <a:solidFill>
-            <a:srgbClr val="F1F5F9"/>
+            <a:srgbClr val="F8FAFC"/>
           </a:solidFill>
           <a:ln>
             <a:solidFill>
@@ -5154,10 +5233,13 @@
           </a:fontRef>
         </p:style>
         <p:txBody>
-          <a:bodyPr rtlCol="0" anchor="ctr" wrap="square"/>
+          <a:bodyPr rtlCol="0" anchor="ctr" wrap="square" lIns="320040" rIns="320040" tIns="292608" bIns="292608"/>
           <a:lstStyle/>
           <a:p>
             <a:pPr algn="ctr">
+              <a:spcAft>
+                <a:spcPts val="1200"/>
+              </a:spcAft>
               <a:defRPr sz="1600" b="1">
                 <a:solidFill>
                   <a:srgbClr val="2563EB"/>
@@ -5171,61 +5253,61 @@
           <a:p>
             <a:pPr>
               <a:spcAft>
-                <a:spcPts val="800"/>
-              </a:spcAft>
-              <a:defRPr sz="1300">
-                <a:solidFill>
-                  <a:srgbClr val="0F172A"/>
-                </a:solidFill>
-              </a:defRPr>
-            </a:pPr>
-            <a:r>
-              <a:t>•  WhatsApp Cloud API Integration: Automatic WhatsApp ping to senior when a junior requests an item.</a:t>
-            </a:r>
-          </a:p>
-          <a:p>
-            <a:pPr>
-              <a:spcAft>
-                <a:spcPts val="800"/>
-              </a:spcAft>
-              <a:defRPr sz="1300">
-                <a:solidFill>
-                  <a:srgbClr val="0F172A"/>
-                </a:solidFill>
-              </a:defRPr>
-            </a:pPr>
-            <a:r>
-              <a:t>•  Hostel Room Delivery Network: Peer student delivery volunteers earning campus karma points.</a:t>
-            </a:r>
-          </a:p>
-          <a:p>
-            <a:pPr>
-              <a:spcAft>
-                <a:spcPts val="800"/>
-              </a:spcAft>
-              <a:defRPr sz="1300">
-                <a:solidFill>
-                  <a:srgbClr val="0F172A"/>
-                </a:solidFill>
-              </a:defRPr>
-            </a:pPr>
-            <a:r>
-              <a:t>•  Smart Return Reminders: Automated calendar reminders 7 days before end-semester exams to return borrowed books.</a:t>
-            </a:r>
-          </a:p>
-          <a:p>
-            <a:pPr>
-              <a:spcAft>
-                <a:spcPts val="800"/>
-              </a:spcAft>
-              <a:defRPr sz="1300">
-                <a:solidFill>
-                  <a:srgbClr val="0F172A"/>
-                </a:solidFill>
-              </a:defRPr>
-            </a:pPr>
-            <a:r>
-              <a:t>•  University Library Integration: Syncing with central library catalog to cross-reference out-of-stock reserve books.</a:t>
+                <a:spcPts val="900"/>
+              </a:spcAft>
+              <a:defRPr sz="1200">
+                <a:solidFill>
+                  <a:srgbClr val="0F172A"/>
+                </a:solidFill>
+              </a:defRPr>
+            </a:pPr>
+            <a:r>
+              <a:t>•  WhatsApp Cloud API Webhooks: Automated messaging notifications alerting seniors when a junior requests an item.</a:t>
+            </a:r>
+          </a:p>
+          <a:p>
+            <a:pPr>
+              <a:spcAft>
+                <a:spcPts val="900"/>
+              </a:spcAft>
+              <a:defRPr sz="1200">
+                <a:solidFill>
+                  <a:srgbClr val="0F172A"/>
+                </a:solidFill>
+              </a:defRPr>
+            </a:pPr>
+            <a:r>
+              <a:t>•  Central Library Smart Lockers: Integration with physical campus lockers for 24/7 contactless handovers and returns.</a:t>
+            </a:r>
+          </a:p>
+          <a:p>
+            <a:pPr>
+              <a:spcAft>
+                <a:spcPts val="900"/>
+              </a:spcAft>
+              <a:defRPr sz="1200">
+                <a:solidFill>
+                  <a:srgbClr val="0F172A"/>
+                </a:solidFill>
+              </a:defRPr>
+            </a:pPr>
+            <a:r>
+              <a:t>•  Automated Academic Return Prompts: Calendar-synced reminders sent prior to end-semester exams to return borrowed books.</a:t>
+            </a:r>
+          </a:p>
+          <a:p>
+            <a:pPr>
+              <a:spcAft>
+                <a:spcPts val="900"/>
+              </a:spcAft>
+              <a:defRPr sz="1200">
+                <a:solidFill>
+                  <a:srgbClr val="0F172A"/>
+                </a:solidFill>
+              </a:defRPr>
+            </a:pPr>
+            <a:r>
+              <a:t>•  University Reserve Catalogue Sync: Cross-referencing university library inventory to highlight high-demand out-of-stock reserve books.</a:t>
             </a:r>
           </a:p>
         </p:txBody>
@@ -5238,14 +5320,14 @@
         </p:nvSpPr>
         <p:spPr>
           <a:xfrm>
-            <a:off x="6309360" y="1554480"/>
-            <a:ext cx="5120640" cy="4846320"/>
+            <a:off x="6291072" y="1600200"/>
+            <a:ext cx="5166360" cy="4709160"/>
           </a:xfrm>
           <a:prstGeom prst="roundRect">
             <a:avLst/>
           </a:prstGeom>
           <a:solidFill>
-            <a:srgbClr val="F1F5F9"/>
+            <a:srgbClr val="F8FAFC"/>
           </a:solidFill>
           <a:ln>
             <a:solidFill>
@@ -5268,10 +5350,13 @@
           </a:fontRef>
         </p:style>
         <p:txBody>
-          <a:bodyPr rtlCol="0" anchor="ctr" wrap="square"/>
+          <a:bodyPr rtlCol="0" anchor="ctr" wrap="square" lIns="320040" rIns="320040" tIns="292608" bIns="292608"/>
           <a:lstStyle/>
           <a:p>
             <a:pPr algn="ctr">
+              <a:spcAft>
+                <a:spcPts val="1200"/>
+              </a:spcAft>
               <a:defRPr sz="1600" b="1">
                 <a:solidFill>
                   <a:srgbClr val="2563EB"/>
@@ -5285,9 +5370,9 @@
           <a:p>
             <a:pPr>
               <a:spcAft>
-                <a:spcPts val="800"/>
-              </a:spcAft>
-              <a:defRPr sz="1300">
+                <a:spcPts val="900"/>
+              </a:spcAft>
+              <a:defRPr sz="1200">
                 <a:solidFill>
                   <a:srgbClr val="0F172A"/>
                 </a:solidFill>
@@ -5300,9 +5385,9 @@
           <a:p>
             <a:pPr>
               <a:spcAft>
-                <a:spcPts val="800"/>
-              </a:spcAft>
-              <a:defRPr sz="1300">
+                <a:spcPts val="900"/>
+              </a:spcAft>
+              <a:defRPr sz="1200">
                 <a:solidFill>
                   <a:srgbClr val="0F172A"/>
                 </a:solidFill>
@@ -5315,9 +5400,9 @@
           <a:p>
             <a:pPr>
               <a:spcAft>
-                <a:spcPts val="800"/>
-              </a:spcAft>
-              <a:defRPr sz="1300">
+                <a:spcPts val="900"/>
+              </a:spcAft>
+              <a:defRPr sz="1200">
                 <a:solidFill>
                   <a:srgbClr val="0F172A"/>
                 </a:solidFill>
@@ -5398,8 +5483,8 @@
         </p:nvSpPr>
         <p:spPr>
           <a:xfrm>
-            <a:off x="1828800" y="2011680"/>
-            <a:ext cx="8534095" cy="2926080"/>
+            <a:off x="1828800" y="1828800"/>
+            <a:ext cx="8534095" cy="3200400"/>
           </a:xfrm>
           <a:prstGeom prst="rect">
             <a:avLst/>
@@ -5413,7 +5498,7 @@
           <a:lstStyle/>
           <a:p>
             <a:pPr algn="ctr">
-              <a:defRPr sz="4400" b="1">
+              <a:defRPr sz="4600" b="1">
                 <a:solidFill>
                   <a:srgbClr val="FFFFFF"/>
                 </a:solidFill>
@@ -5421,28 +5506,31 @@
             </a:pPr>
             <a:r>
               <a:t>Thank You!</a:t>
-            </a:r>
-          </a:p>
-          <a:p>
-            <a:pPr algn="ctr">
-              <a:defRPr sz="2000">
-                <a:solidFill>
-                  <a:srgbClr val="93C5FD"/>
-                </a:solidFill>
-              </a:defRPr>
-            </a:pPr>
-            <a:r>
-              <a:t>Questions &amp; Feedback Welcome</a:t>
             </a:r>
           </a:p>
           <a:p>
             <a:pPr algn="ctr">
               <a:spcBef>
-                <a:spcPts val="2000"/>
+                <a:spcPts val="800"/>
               </a:spcBef>
-              <a:defRPr sz="1400">
-                <a:solidFill>
-                  <a:srgbClr val="64748B"/>
+              <a:defRPr sz="2000">
+                <a:solidFill>
+                  <a:srgbClr val="93C5FD"/>
+                </a:solidFill>
+              </a:defRPr>
+            </a:pPr>
+            <a:r>
+              <a:t>Questions &amp; Feedback Welcome</a:t>
+            </a:r>
+          </a:p>
+          <a:p>
+            <a:pPr algn="ctr">
+              <a:spcBef>
+                <a:spcPts val="2400"/>
+              </a:spcBef>
+              <a:defRPr sz="1300">
+                <a:solidFill>
+                  <a:srgbClr val="94A3B8"/>
                 </a:solidFill>
               </a:defRPr>
             </a:pPr>
@@ -5478,7 +5566,7 @@
         </p:nvSpPr>
         <p:spPr>
           <a:xfrm>
-            <a:off x="731520" y="365760"/>
+            <a:off x="731520" y="502920"/>
             <a:ext cx="10728655" cy="1005840"/>
           </a:xfrm>
           <a:prstGeom prst="rect">
@@ -5493,14 +5581,17 @@
           <a:lstStyle/>
           <a:p>
             <a:pPr>
+              <a:spcAft>
+                <a:spcPts val="200"/>
+              </a:spcAft>
               <a:defRPr sz="1100" b="1">
                 <a:solidFill>
-                  <a:srgbClr val="2563EB"/>
-                </a:solidFill>
-              </a:defRPr>
-            </a:pPr>
-            <a:r>
-              <a:t>DESIGN THINKING HUM_4342</a:t>
+                  <a:srgbClr val="0071E3"/>
+                </a:solidFill>
+              </a:defRPr>
+            </a:pPr>
+            <a:r>
+              <a:t>TABLE OF CONTENTS</a:t>
             </a:r>
           </a:p>
           <a:p>
@@ -5512,7 +5603,7 @@
               </a:defRPr>
             </a:pPr>
             <a:r>
-              <a:t>Table of Contents</a:t>
+              <a:t>Executive Presentation Agenda</a:t>
             </a:r>
           </a:p>
         </p:txBody>
@@ -5525,8 +5616,8 @@
         </p:nvSpPr>
         <p:spPr>
           <a:xfrm>
-            <a:off x="731520" y="1280160"/>
-            <a:ext cx="10728655" cy="36576"/>
+            <a:off x="731520" y="1371600"/>
+            <a:ext cx="10728655" cy="22860"/>
           </a:xfrm>
           <a:prstGeom prst="rect">
             <a:avLst/>
@@ -5535,9 +5626,7 @@
             <a:srgbClr val="2563EB"/>
           </a:solidFill>
           <a:ln>
-            <a:solidFill>
-              <a:srgbClr val="2563EB"/>
-            </a:solidFill>
+            <a:noFill/>
           </a:ln>
         </p:spPr>
         <p:style>
@@ -5570,14 +5659,14 @@
         </p:nvSpPr>
         <p:spPr>
           <a:xfrm>
-            <a:off x="914400" y="1645920"/>
-            <a:ext cx="4937760" cy="640080"/>
+            <a:off x="731520" y="1691640"/>
+            <a:ext cx="5257800" cy="1325880"/>
           </a:xfrm>
           <a:prstGeom prst="roundRect">
             <a:avLst/>
           </a:prstGeom>
           <a:solidFill>
-            <a:srgbClr val="F1F5F9"/>
+            <a:srgbClr val="F8FAFC"/>
           </a:solidFill>
           <a:ln>
             <a:solidFill>
@@ -5600,18 +5689,33 @@
           </a:fontRef>
         </p:style>
         <p:txBody>
-          <a:bodyPr rtlCol="0" anchor="ctr" wrap="square"/>
+          <a:bodyPr rtlCol="0" anchor="ctr" wrap="square" lIns="274320" rIns="274320" tIns="182880" bIns="182880"/>
           <a:lstStyle/>
           <a:p>
             <a:pPr algn="ctr">
-              <a:defRPr sz="1300" b="1">
-                <a:solidFill>
-                  <a:srgbClr val="0F172A"/>
-                </a:solidFill>
-              </a:defRPr>
-            </a:pPr>
-            <a:r>
-              <a:t>01   Introduction &amp; Problem Overview</a:t>
+              <a:spcAft>
+                <a:spcPts val="400"/>
+              </a:spcAft>
+              <a:defRPr sz="1400" b="1">
+                <a:solidFill>
+                  <a:srgbClr val="2563EB"/>
+                </a:solidFill>
+              </a:defRPr>
+            </a:pPr>
+            <a:r>
+              <a:t>01   Phase 0: Context &amp; Motivation</a:t>
+            </a:r>
+          </a:p>
+          <a:p>
+            <a:pPr>
+              <a:defRPr sz="1100">
+                <a:solidFill>
+                  <a:srgbClr val="64748B"/>
+                </a:solidFill>
+              </a:defRPr>
+            </a:pPr>
+            <a:r>
+              <a:t>Campus resource friction, specialized tools, and commercial marketplace shortcomings.</a:t>
             </a:r>
           </a:p>
         </p:txBody>
@@ -5624,14 +5728,14 @@
         </p:nvSpPr>
         <p:spPr>
           <a:xfrm>
-            <a:off x="914400" y="2423160"/>
-            <a:ext cx="4937760" cy="640080"/>
+            <a:off x="731520" y="3200400"/>
+            <a:ext cx="5257800" cy="1325880"/>
           </a:xfrm>
           <a:prstGeom prst="roundRect">
             <a:avLst/>
           </a:prstGeom>
           <a:solidFill>
-            <a:srgbClr val="F1F5F9"/>
+            <a:srgbClr val="F8FAFC"/>
           </a:solidFill>
           <a:ln>
             <a:solidFill>
@@ -5654,18 +5758,33 @@
           </a:fontRef>
         </p:style>
         <p:txBody>
-          <a:bodyPr rtlCol="0" anchor="ctr" wrap="square"/>
+          <a:bodyPr rtlCol="0" anchor="ctr" wrap="square" lIns="274320" rIns="274320" tIns="182880" bIns="182880"/>
           <a:lstStyle/>
           <a:p>
             <a:pPr algn="ctr">
-              <a:defRPr sz="1300" b="1">
-                <a:solidFill>
-                  <a:srgbClr val="0F172A"/>
-                </a:solidFill>
-              </a:defRPr>
-            </a:pPr>
-            <a:r>
-              <a:t>02   Patent, Publication &amp; Product Search</a:t>
+              <a:spcAft>
+                <a:spcPts val="400"/>
+              </a:spcAft>
+              <a:defRPr sz="1400" b="1">
+                <a:solidFill>
+                  <a:srgbClr val="2563EB"/>
+                </a:solidFill>
+              </a:defRPr>
+            </a:pPr>
+            <a:r>
+              <a:t>02   Phase 1: Empathy &amp; Field Inquiry</a:t>
+            </a:r>
+          </a:p>
+          <a:p>
+            <a:pPr>
+              <a:defRPr sz="1100">
+                <a:solidFill>
+                  <a:srgbClr val="64748B"/>
+                </a:solidFill>
+              </a:defRPr>
+            </a:pPr>
+            <a:r>
+              <a:t>Observational inquiry into student WhatsApp trading groups and customer journey mapping.</a:t>
             </a:r>
           </a:p>
         </p:txBody>
@@ -5678,14 +5797,14 @@
         </p:nvSpPr>
         <p:spPr>
           <a:xfrm>
-            <a:off x="914400" y="3200400"/>
-            <a:ext cx="4937760" cy="640080"/>
+            <a:off x="731520" y="4709160"/>
+            <a:ext cx="5257800" cy="1325880"/>
           </a:xfrm>
           <a:prstGeom prst="roundRect">
             <a:avLst/>
           </a:prstGeom>
           <a:solidFill>
-            <a:srgbClr val="F1F5F9"/>
+            <a:srgbClr val="F8FAFC"/>
           </a:solidFill>
           <a:ln>
             <a:solidFill>
@@ -5708,18 +5827,33 @@
           </a:fontRef>
         </p:style>
         <p:txBody>
-          <a:bodyPr rtlCol="0" anchor="ctr" wrap="square"/>
+          <a:bodyPr rtlCol="0" anchor="ctr" wrap="square" lIns="274320" rIns="274320" tIns="182880" bIns="182880"/>
           <a:lstStyle/>
           <a:p>
             <a:pPr algn="ctr">
-              <a:defRPr sz="1300" b="1">
-                <a:solidFill>
-                  <a:srgbClr val="0F172A"/>
-                </a:solidFill>
-              </a:defRPr>
-            </a:pPr>
-            <a:r>
-              <a:t>03   Empathize Phase: Customer Journey Mapping</a:t>
+              <a:spcAft>
+                <a:spcPts val="400"/>
+              </a:spcAft>
+              <a:defRPr sz="1400" b="1">
+                <a:solidFill>
+                  <a:srgbClr val="2563EB"/>
+                </a:solidFill>
+              </a:defRPr>
+            </a:pPr>
+            <a:r>
+              <a:t>03   Phase 1: Define Problem Statement</a:t>
+            </a:r>
+          </a:p>
+          <a:p>
+            <a:pPr>
+              <a:defRPr sz="1100">
+                <a:solidFill>
+                  <a:srgbClr val="64748B"/>
+                </a:solidFill>
+              </a:defRPr>
+            </a:pPr>
+            <a:r>
+              <a:t>Bounded human-centered problem definition, affected cohorts, and institutional drivers.</a:t>
             </a:r>
           </a:p>
         </p:txBody>
@@ -5732,14 +5866,14 @@
         </p:nvSpPr>
         <p:spPr>
           <a:xfrm>
-            <a:off x="914400" y="3977639"/>
-            <a:ext cx="4937760" cy="640080"/>
+            <a:off x="6172200" y="1691640"/>
+            <a:ext cx="5257800" cy="1325880"/>
           </a:xfrm>
           <a:prstGeom prst="roundRect">
             <a:avLst/>
           </a:prstGeom>
           <a:solidFill>
-            <a:srgbClr val="F1F5F9"/>
+            <a:srgbClr val="F8FAFC"/>
           </a:solidFill>
           <a:ln>
             <a:solidFill>
@@ -5762,18 +5896,33 @@
           </a:fontRef>
         </p:style>
         <p:txBody>
-          <a:bodyPr rtlCol="0" anchor="ctr" wrap="square"/>
+          <a:bodyPr rtlCol="0" anchor="ctr" wrap="square" lIns="274320" rIns="274320" tIns="182880" bIns="182880"/>
           <a:lstStyle/>
           <a:p>
             <a:pPr algn="ctr">
-              <a:defRPr sz="1300" b="1">
-                <a:solidFill>
-                  <a:srgbClr val="0F172A"/>
-                </a:solidFill>
-              </a:defRPr>
-            </a:pPr>
-            <a:r>
-              <a:t>04   Define Phase: Problem Statement</a:t>
+              <a:spcAft>
+                <a:spcPts val="400"/>
+              </a:spcAft>
+              <a:defRPr sz="1400" b="1">
+                <a:solidFill>
+                  <a:srgbClr val="2563EB"/>
+                </a:solidFill>
+              </a:defRPr>
+            </a:pPr>
+            <a:r>
+              <a:t>04   Phases 2 &amp; 3: Root Cause &amp; Solution</a:t>
+            </a:r>
+          </a:p>
+          <a:p>
+            <a:pPr>
+              <a:defRPr sz="1100">
+                <a:solidFill>
+                  <a:srgbClr val="64748B"/>
+                </a:solidFill>
+              </a:defRPr>
+            </a:pPr>
+            <a:r>
+              <a:t>5-Whys root cause analysis, HMW opportunities, and multi-tier exchange formulation.</a:t>
             </a:r>
           </a:p>
         </p:txBody>
@@ -5786,14 +5935,14 @@
         </p:nvSpPr>
         <p:spPr>
           <a:xfrm>
-            <a:off x="914400" y="4754880"/>
-            <a:ext cx="4937760" cy="640080"/>
+            <a:off x="6172200" y="3200400"/>
+            <a:ext cx="5257800" cy="1325880"/>
           </a:xfrm>
           <a:prstGeom prst="roundRect">
             <a:avLst/>
           </a:prstGeom>
           <a:solidFill>
-            <a:srgbClr val="F1F5F9"/>
+            <a:srgbClr val="F8FAFC"/>
           </a:solidFill>
           <a:ln>
             <a:solidFill>
@@ -5816,18 +5965,33 @@
           </a:fontRef>
         </p:style>
         <p:txBody>
-          <a:bodyPr rtlCol="0" anchor="ctr" wrap="square"/>
+          <a:bodyPr rtlCol="0" anchor="ctr" wrap="square" lIns="274320" rIns="274320" tIns="182880" bIns="182880"/>
           <a:lstStyle/>
           <a:p>
             <a:pPr algn="ctr">
-              <a:defRPr sz="1300" b="1">
-                <a:solidFill>
-                  <a:srgbClr val="0F172A"/>
-                </a:solidFill>
-              </a:defRPr>
-            </a:pPr>
-            <a:r>
-              <a:t>05   Analyze Phase: 5-Whys &amp; How Might We...</a:t>
+              <a:spcAft>
+                <a:spcPts val="400"/>
+              </a:spcAft>
+              <a:defRPr sz="1400" b="1">
+                <a:solidFill>
+                  <a:srgbClr val="2563EB"/>
+                </a:solidFill>
+              </a:defRPr>
+            </a:pPr>
+            <a:r>
+              <a:t>05   Phase 4: Prototype &amp; Privacy System</a:t>
+            </a:r>
+          </a:p>
+          <a:p>
+            <a:pPr>
+              <a:defRPr sz="1100">
+                <a:solidFill>
+                  <a:srgbClr val="64748B"/>
+                </a:solidFill>
+              </a:defRPr>
+            </a:pPr>
+            <a:r>
+              <a:t>Apple-grade web application, Zero-Knowledge Ghost Privacy, and direct on-spot UPI.</a:t>
             </a:r>
           </a:p>
         </p:txBody>
@@ -5840,14 +6004,14 @@
         </p:nvSpPr>
         <p:spPr>
           <a:xfrm>
-            <a:off x="914400" y="5532120"/>
-            <a:ext cx="4937760" cy="640080"/>
+            <a:off x="6172200" y="4709160"/>
+            <a:ext cx="5257800" cy="1325880"/>
           </a:xfrm>
           <a:prstGeom prst="roundRect">
             <a:avLst/>
           </a:prstGeom>
           <a:solidFill>
-            <a:srgbClr val="F1F5F9"/>
+            <a:srgbClr val="F8FAFC"/>
           </a:solidFill>
           <a:ln>
             <a:solidFill>
@@ -5870,342 +6034,33 @@
           </a:fontRef>
         </p:style>
         <p:txBody>
-          <a:bodyPr rtlCol="0" anchor="ctr" wrap="square"/>
+          <a:bodyPr rtlCol="0" anchor="ctr" wrap="square" lIns="274320" rIns="274320" tIns="182880" bIns="182880"/>
           <a:lstStyle/>
           <a:p>
             <a:pPr algn="ctr">
-              <a:defRPr sz="1300" b="1">
-                <a:solidFill>
-                  <a:srgbClr val="0F172A"/>
-                </a:solidFill>
-              </a:defRPr>
-            </a:pPr>
-            <a:r>
-              <a:t>06   Solve Phase: Ideation &amp; Brainstorming</a:t>
-            </a:r>
-          </a:p>
-        </p:txBody>
-      </p:sp>
-      <p:sp>
-        <p:nvSpPr>
-          <p:cNvPr id="10" name="Rounded Rectangle 9"/>
-          <p:cNvSpPr/>
-          <p:nvPr/>
-        </p:nvSpPr>
-        <p:spPr>
-          <a:xfrm>
-            <a:off x="6217920" y="1645920"/>
-            <a:ext cx="4937760" cy="640080"/>
-          </a:xfrm>
-          <a:prstGeom prst="roundRect">
-            <a:avLst/>
-          </a:prstGeom>
-          <a:solidFill>
-            <a:srgbClr val="F1F5F9"/>
-          </a:solidFill>
-          <a:ln>
-            <a:solidFill>
-              <a:srgbClr val="E2E8F0"/>
-            </a:solidFill>
-          </a:ln>
-        </p:spPr>
-        <p:style>
-          <a:lnRef idx="1">
-            <a:schemeClr val="accent1"/>
-          </a:lnRef>
-          <a:fillRef idx="3">
-            <a:schemeClr val="accent1"/>
-          </a:fillRef>
-          <a:effectRef idx="2">
-            <a:schemeClr val="accent1"/>
-          </a:effectRef>
-          <a:fontRef idx="minor">
-            <a:schemeClr val="lt1"/>
-          </a:fontRef>
-        </p:style>
-        <p:txBody>
-          <a:bodyPr rtlCol="0" anchor="ctr" wrap="square"/>
-          <a:lstStyle/>
-          <a:p>
-            <a:pPr algn="ctr">
-              <a:defRPr sz="1300" b="1">
-                <a:solidFill>
-                  <a:srgbClr val="0F172A"/>
-                </a:solidFill>
-              </a:defRPr>
-            </a:pPr>
-            <a:r>
-              <a:t>07   Target Users &amp; Stakeholders</a:t>
-            </a:r>
-          </a:p>
-        </p:txBody>
-      </p:sp>
-      <p:sp>
-        <p:nvSpPr>
-          <p:cNvPr id="11" name="Rounded Rectangle 10"/>
-          <p:cNvSpPr/>
-          <p:nvPr/>
-        </p:nvSpPr>
-        <p:spPr>
-          <a:xfrm>
-            <a:off x="6217920" y="2423160"/>
-            <a:ext cx="4937760" cy="640080"/>
-          </a:xfrm>
-          <a:prstGeom prst="roundRect">
-            <a:avLst/>
-          </a:prstGeom>
-          <a:solidFill>
-            <a:srgbClr val="F1F5F9"/>
-          </a:solidFill>
-          <a:ln>
-            <a:solidFill>
-              <a:srgbClr val="E2E8F0"/>
-            </a:solidFill>
-          </a:ln>
-        </p:spPr>
-        <p:style>
-          <a:lnRef idx="1">
-            <a:schemeClr val="accent1"/>
-          </a:lnRef>
-          <a:fillRef idx="3">
-            <a:schemeClr val="accent1"/>
-          </a:fillRef>
-          <a:effectRef idx="2">
-            <a:schemeClr val="accent1"/>
-          </a:effectRef>
-          <a:fontRef idx="minor">
-            <a:schemeClr val="lt1"/>
-          </a:fontRef>
-        </p:style>
-        <p:txBody>
-          <a:bodyPr rtlCol="0" anchor="ctr" wrap="square"/>
-          <a:lstStyle/>
-          <a:p>
-            <a:pPr algn="ctr">
-              <a:defRPr sz="1300" b="1">
-                <a:solidFill>
-                  <a:srgbClr val="0F172A"/>
-                </a:solidFill>
-              </a:defRPr>
-            </a:pPr>
-            <a:r>
-              <a:t>08   Project Objectives &amp; Methodology</a:t>
-            </a:r>
-          </a:p>
-        </p:txBody>
-      </p:sp>
-      <p:sp>
-        <p:nvSpPr>
-          <p:cNvPr id="12" name="Rounded Rectangle 11"/>
-          <p:cNvSpPr/>
-          <p:nvPr/>
-        </p:nvSpPr>
-        <p:spPr>
-          <a:xfrm>
-            <a:off x="6217920" y="3200400"/>
-            <a:ext cx="4937760" cy="640080"/>
-          </a:xfrm>
-          <a:prstGeom prst="roundRect">
-            <a:avLst/>
-          </a:prstGeom>
-          <a:solidFill>
-            <a:srgbClr val="F1F5F9"/>
-          </a:solidFill>
-          <a:ln>
-            <a:solidFill>
-              <a:srgbClr val="E2E8F0"/>
-            </a:solidFill>
-          </a:ln>
-        </p:spPr>
-        <p:style>
-          <a:lnRef idx="1">
-            <a:schemeClr val="accent1"/>
-          </a:lnRef>
-          <a:fillRef idx="3">
-            <a:schemeClr val="accent1"/>
-          </a:fillRef>
-          <a:effectRef idx="2">
-            <a:schemeClr val="accent1"/>
-          </a:effectRef>
-          <a:fontRef idx="minor">
-            <a:schemeClr val="lt1"/>
-          </a:fontRef>
-        </p:style>
-        <p:txBody>
-          <a:bodyPr rtlCol="0" anchor="ctr" wrap="square"/>
-          <a:lstStyle/>
-          <a:p>
-            <a:pPr algn="ctr">
-              <a:defRPr sz="1300" b="1">
-                <a:solidFill>
-                  <a:srgbClr val="0F172A"/>
-                </a:solidFill>
-              </a:defRPr>
-            </a:pPr>
-            <a:r>
-              <a:t>09   Make / Test Phase: Web Prototype</a:t>
-            </a:r>
-          </a:p>
-        </p:txBody>
-      </p:sp>
-      <p:sp>
-        <p:nvSpPr>
-          <p:cNvPr id="13" name="Rounded Rectangle 12"/>
-          <p:cNvSpPr/>
-          <p:nvPr/>
-        </p:nvSpPr>
-        <p:spPr>
-          <a:xfrm>
-            <a:off x="6217920" y="3977639"/>
-            <a:ext cx="4937760" cy="640080"/>
-          </a:xfrm>
-          <a:prstGeom prst="roundRect">
-            <a:avLst/>
-          </a:prstGeom>
-          <a:solidFill>
-            <a:srgbClr val="F1F5F9"/>
-          </a:solidFill>
-          <a:ln>
-            <a:solidFill>
-              <a:srgbClr val="E2E8F0"/>
-            </a:solidFill>
-          </a:ln>
-        </p:spPr>
-        <p:style>
-          <a:lnRef idx="1">
-            <a:schemeClr val="accent1"/>
-          </a:lnRef>
-          <a:fillRef idx="3">
-            <a:schemeClr val="accent1"/>
-          </a:fillRef>
-          <a:effectRef idx="2">
-            <a:schemeClr val="accent1"/>
-          </a:effectRef>
-          <a:fontRef idx="minor">
-            <a:schemeClr val="lt1"/>
-          </a:fontRef>
-        </p:style>
-        <p:txBody>
-          <a:bodyPr rtlCol="0" anchor="ctr" wrap="square"/>
-          <a:lstStyle/>
-          <a:p>
-            <a:pPr algn="ctr">
-              <a:defRPr sz="1300" b="1">
-                <a:solidFill>
-                  <a:srgbClr val="0F172A"/>
-                </a:solidFill>
-              </a:defRPr>
-            </a:pPr>
-            <a:r>
-              <a:t>10   Prototype Implementation &amp; Features</a:t>
-            </a:r>
-          </a:p>
-        </p:txBody>
-      </p:sp>
-      <p:sp>
-        <p:nvSpPr>
-          <p:cNvPr id="14" name="Rounded Rectangle 13"/>
-          <p:cNvSpPr/>
-          <p:nvPr/>
-        </p:nvSpPr>
-        <p:spPr>
-          <a:xfrm>
-            <a:off x="6217920" y="4754880"/>
-            <a:ext cx="4937760" cy="640080"/>
-          </a:xfrm>
-          <a:prstGeom prst="roundRect">
-            <a:avLst/>
-          </a:prstGeom>
-          <a:solidFill>
-            <a:srgbClr val="F1F5F9"/>
-          </a:solidFill>
-          <a:ln>
-            <a:solidFill>
-              <a:srgbClr val="E2E8F0"/>
-            </a:solidFill>
-          </a:ln>
-        </p:spPr>
-        <p:style>
-          <a:lnRef idx="1">
-            <a:schemeClr val="accent1"/>
-          </a:lnRef>
-          <a:fillRef idx="3">
-            <a:schemeClr val="accent1"/>
-          </a:fillRef>
-          <a:effectRef idx="2">
-            <a:schemeClr val="accent1"/>
-          </a:effectRef>
-          <a:fontRef idx="minor">
-            <a:schemeClr val="lt1"/>
-          </a:fontRef>
-        </p:style>
-        <p:txBody>
-          <a:bodyPr rtlCol="0" anchor="ctr" wrap="square"/>
-          <a:lstStyle/>
-          <a:p>
-            <a:pPr algn="ctr">
-              <a:defRPr sz="1300" b="1">
-                <a:solidFill>
-                  <a:srgbClr val="0F172A"/>
-                </a:solidFill>
-              </a:defRPr>
-            </a:pPr>
-            <a:r>
-              <a:t>11   Testing, Evaluation &amp; User Results</a:t>
-            </a:r>
-          </a:p>
-        </p:txBody>
-      </p:sp>
-      <p:sp>
-        <p:nvSpPr>
-          <p:cNvPr id="15" name="Rounded Rectangle 14"/>
-          <p:cNvSpPr/>
-          <p:nvPr/>
-        </p:nvSpPr>
-        <p:spPr>
-          <a:xfrm>
-            <a:off x="6217920" y="5532120"/>
-            <a:ext cx="4937760" cy="640080"/>
-          </a:xfrm>
-          <a:prstGeom prst="roundRect">
-            <a:avLst/>
-          </a:prstGeom>
-          <a:solidFill>
-            <a:srgbClr val="F1F5F9"/>
-          </a:solidFill>
-          <a:ln>
-            <a:solidFill>
-              <a:srgbClr val="E2E8F0"/>
-            </a:solidFill>
-          </a:ln>
-        </p:spPr>
-        <p:style>
-          <a:lnRef idx="1">
-            <a:schemeClr val="accent1"/>
-          </a:lnRef>
-          <a:fillRef idx="3">
-            <a:schemeClr val="accent1"/>
-          </a:fillRef>
-          <a:effectRef idx="2">
-            <a:schemeClr val="accent1"/>
-          </a:effectRef>
-          <a:fontRef idx="minor">
-            <a:schemeClr val="lt1"/>
-          </a:fontRef>
-        </p:style>
-        <p:txBody>
-          <a:bodyPr rtlCol="0" anchor="ctr" wrap="square"/>
-          <a:lstStyle/>
-          <a:p>
-            <a:pPr algn="ctr">
-              <a:defRPr sz="1300" b="1">
-                <a:solidFill>
-                  <a:srgbClr val="0F172A"/>
-                </a:solidFill>
-              </a:defRPr>
-            </a:pPr>
-            <a:r>
-              <a:t>12   Future Scope &amp; Conclusion</a:t>
+              <a:spcAft>
+                <a:spcPts val="400"/>
+              </a:spcAft>
+              <a:defRPr sz="1400" b="1">
+                <a:solidFill>
+                  <a:srgbClr val="2563EB"/>
+                </a:solidFill>
+              </a:defRPr>
+            </a:pPr>
+            <a:r>
+              <a:t>06   Phase 4: Validation &amp; Future Scope</a:t>
+            </a:r>
+          </a:p>
+          <a:p>
+            <a:pPr>
+              <a:defRPr sz="1100">
+                <a:solidFill>
+                  <a:srgbClr val="64748B"/>
+                </a:solidFill>
+              </a:defRPr>
+            </a:pPr>
+            <a:r>
+              <a:t>Peer walkthrough findings, anti-harassment comfort, version 2.0 roadmap, and learnings.</a:t>
             </a:r>
           </a:p>
         </p:txBody>
@@ -6236,7 +6091,7 @@
         </p:nvSpPr>
         <p:spPr>
           <a:xfrm>
-            <a:off x="731520" y="365760"/>
+            <a:off x="731520" y="502920"/>
             <a:ext cx="10728655" cy="1005840"/>
           </a:xfrm>
           <a:prstGeom prst="rect">
@@ -6251,9 +6106,12 @@
           <a:lstStyle/>
           <a:p>
             <a:pPr>
+              <a:spcAft>
+                <a:spcPts val="200"/>
+              </a:spcAft>
               <a:defRPr sz="1100" b="1">
                 <a:solidFill>
-                  <a:srgbClr val="2563EB"/>
+                  <a:srgbClr val="0071E3"/>
                 </a:solidFill>
               </a:defRPr>
             </a:pPr>
@@ -6283,8 +6141,8 @@
         </p:nvSpPr>
         <p:spPr>
           <a:xfrm>
-            <a:off x="731520" y="1280160"/>
-            <a:ext cx="10728655" cy="36576"/>
+            <a:off x="731520" y="1371600"/>
+            <a:ext cx="10728655" cy="22860"/>
           </a:xfrm>
           <a:prstGeom prst="rect">
             <a:avLst/>
@@ -6293,9 +6151,7 @@
             <a:srgbClr val="2563EB"/>
           </a:solidFill>
           <a:ln>
-            <a:solidFill>
-              <a:srgbClr val="2563EB"/>
-            </a:solidFill>
+            <a:noFill/>
           </a:ln>
         </p:spPr>
         <p:style>
@@ -6328,14 +6184,14 @@
         </p:nvSpPr>
         <p:spPr>
           <a:xfrm>
-            <a:off x="731520" y="1554480"/>
-            <a:ext cx="5120640" cy="4846320"/>
+            <a:off x="731520" y="1600200"/>
+            <a:ext cx="5166360" cy="4709160"/>
           </a:xfrm>
           <a:prstGeom prst="roundRect">
             <a:avLst/>
           </a:prstGeom>
           <a:solidFill>
-            <a:srgbClr val="F1F5F9"/>
+            <a:srgbClr val="F8FAFC"/>
           </a:solidFill>
           <a:ln>
             <a:solidFill>
@@ -6358,10 +6214,13 @@
           </a:fontRef>
         </p:style>
         <p:txBody>
-          <a:bodyPr rtlCol="0" anchor="ctr" wrap="square"/>
+          <a:bodyPr rtlCol="0" anchor="ctr" wrap="square" lIns="320040" rIns="320040" tIns="292608" bIns="292608"/>
           <a:lstStyle/>
           <a:p>
             <a:pPr algn="ctr">
+              <a:spcAft>
+                <a:spcPts val="1200"/>
+              </a:spcAft>
               <a:defRPr sz="1600" b="1">
                 <a:solidFill>
                   <a:srgbClr val="2563EB"/>
@@ -6369,67 +6228,67 @@
               </a:defRPr>
             </a:pPr>
             <a:r>
-              <a:t>The High Cost of 1-Semester Academic Gear</a:t>
-            </a:r>
-          </a:p>
-          <a:p>
-            <a:pPr>
-              <a:spcAft>
-                <a:spcPts val="800"/>
-              </a:spcAft>
-              <a:defRPr sz="1300">
-                <a:solidFill>
-                  <a:srgbClr val="0F172A"/>
-                </a:solidFill>
-              </a:defRPr>
-            </a:pPr>
-            <a:r>
-              <a:t>•  Freshers and engineering students are required to buy specialized items every semester (Higher Engg Math books, Casio fx-991 calculators, chemistry lab coats, mini drafters).</a:t>
-            </a:r>
-          </a:p>
-          <a:p>
-            <a:pPr>
-              <a:spcAft>
-                <a:spcPts val="800"/>
-              </a:spcAft>
-              <a:defRPr sz="1300">
-                <a:solidFill>
-                  <a:srgbClr val="0F172A"/>
-                </a:solidFill>
-              </a:defRPr>
-            </a:pPr>
-            <a:r>
-              <a:t>•  Emergency Single-Use Friction: Requirements like scientific calculators and lab coats are often needed right before exams or for isolated lab practicals.</a:t>
-            </a:r>
-          </a:p>
-          <a:p>
-            <a:pPr>
-              <a:spcAft>
-                <a:spcPts val="800"/>
-              </a:spcAft>
-              <a:defRPr sz="1300">
-                <a:solidFill>
-                  <a:srgbClr val="0F172A"/>
-                </a:solidFill>
-              </a:defRPr>
-            </a:pPr>
-            <a:r>
-              <a:t>•  Crucial realization: Once the 3-hour exam or single semester ends, these expensive items (costing ₹1,500+) are rarely or never touched again.</a:t>
-            </a:r>
-          </a:p>
-          <a:p>
-            <a:pPr>
-              <a:spcAft>
-                <a:spcPts val="800"/>
-              </a:spcAft>
-              <a:defRPr sz="1300">
-                <a:solidFill>
-                  <a:srgbClr val="0F172A"/>
-                </a:solidFill>
-              </a:defRPr>
-            </a:pPr>
-            <a:r>
-              <a:t>•  Result: Heavy, recurring financial waste on one-time requirements.</a:t>
+              <a:t>The High Cost of Single-Semester Academic Tools</a:t>
+            </a:r>
+          </a:p>
+          <a:p>
+            <a:pPr>
+              <a:spcAft>
+                <a:spcPts val="900"/>
+              </a:spcAft>
+              <a:defRPr sz="1200">
+                <a:solidFill>
+                  <a:srgbClr val="0F172A"/>
+                </a:solidFill>
+              </a:defRPr>
+            </a:pPr>
+            <a:r>
+              <a:t>•  Coursework Equipment Demands: Engineering students are required to procure specialized gear each semester (advanced math reference books, scientific calculators, chemistry aprons, and mini drafters).</a:t>
+            </a:r>
+          </a:p>
+          <a:p>
+            <a:pPr>
+              <a:spcAft>
+                <a:spcPts val="900"/>
+              </a:spcAft>
+              <a:defRPr sz="1200">
+                <a:solidFill>
+                  <a:srgbClr val="0F172A"/>
+                </a:solidFill>
+              </a:defRPr>
+            </a:pPr>
+            <a:r>
+              <a:t>•  Emergency Single-Use Friction: Critical tools are frequently required with little advance notice right before examinations or isolated practical vivas.</a:t>
+            </a:r>
+          </a:p>
+          <a:p>
+            <a:pPr>
+              <a:spcAft>
+                <a:spcPts val="900"/>
+              </a:spcAft>
+              <a:defRPr sz="1200">
+                <a:solidFill>
+                  <a:srgbClr val="0F172A"/>
+                </a:solidFill>
+              </a:defRPr>
+            </a:pPr>
+            <a:r>
+              <a:t>•  The Dormant Asset Problem: Once coursework ends, specialized instruments remain abandoned in hostel cupboards rather than circulating to juniors.</a:t>
+            </a:r>
+          </a:p>
+          <a:p>
+            <a:pPr>
+              <a:spcAft>
+                <a:spcPts val="900"/>
+              </a:spcAft>
+              <a:defRPr sz="1200">
+                <a:solidFill>
+                  <a:srgbClr val="0F172A"/>
+                </a:solidFill>
+              </a:defRPr>
+            </a:pPr>
+            <a:r>
+              <a:t>•  Compounding Financial Strain: Students face recurring out-of-pocket expenses purchasing brand-new supplies from commercial retail shops.</a:t>
             </a:r>
           </a:p>
         </p:txBody>
@@ -6442,14 +6301,14 @@
         </p:nvSpPr>
         <p:spPr>
           <a:xfrm>
-            <a:off x="6309360" y="1554480"/>
-            <a:ext cx="5120640" cy="4846320"/>
+            <a:off x="6291072" y="1600200"/>
+            <a:ext cx="5166360" cy="4709160"/>
           </a:xfrm>
           <a:prstGeom prst="roundRect">
             <a:avLst/>
           </a:prstGeom>
           <a:solidFill>
-            <a:srgbClr val="F1F5F9"/>
+            <a:srgbClr val="F8FAFC"/>
           </a:solidFill>
           <a:ln>
             <a:solidFill>
@@ -6472,10 +6331,13 @@
           </a:fontRef>
         </p:style>
         <p:txBody>
-          <a:bodyPr rtlCol="0" anchor="ctr" wrap="square"/>
+          <a:bodyPr rtlCol="0" anchor="ctr" wrap="square" lIns="320040" rIns="320040" tIns="292608" bIns="292608"/>
           <a:lstStyle/>
           <a:p>
             <a:pPr algn="ctr">
+              <a:spcAft>
+                <a:spcPts val="1200"/>
+              </a:spcAft>
               <a:defRPr sz="1600" b="1">
                 <a:solidFill>
                   <a:srgbClr val="2563EB"/>
@@ -6483,67 +6345,67 @@
               </a:defRPr>
             </a:pPr>
             <a:r>
-              <a:t>The Senior Resource Hoarding Problem</a:t>
-            </a:r>
-          </a:p>
-          <a:p>
-            <a:pPr>
-              <a:spcAft>
-                <a:spcPts val="800"/>
-              </a:spcAft>
-              <a:defRPr sz="1300">
-                <a:solidFill>
-                  <a:srgbClr val="0F172A"/>
-                </a:solidFill>
-              </a:defRPr>
-            </a:pPr>
-            <a:r>
-              <a:t>•  Seniors in 3rd and 4th year possess hundreds of working calculators, lab coats, and books sitting idle in hostel rooms.</a:t>
-            </a:r>
-          </a:p>
-          <a:p>
-            <a:pPr>
-              <a:spcAft>
-                <a:spcPts val="800"/>
-              </a:spcAft>
-              <a:defRPr sz="1300">
-                <a:solidFill>
-                  <a:srgbClr val="0F172A"/>
-                </a:solidFill>
-              </a:defRPr>
-            </a:pPr>
-            <a:r>
-              <a:t>•  Current informal methods (WhatsApp groups, Telegram channels) fail in urgent emergencies because posts get buried under hundreds of messages.</a:t>
-            </a:r>
-          </a:p>
-          <a:p>
-            <a:pPr>
-              <a:spcAft>
-                <a:spcPts val="800"/>
-              </a:spcAft>
-              <a:defRPr sz="1300">
-                <a:solidFill>
-                  <a:srgbClr val="0F172A"/>
-                </a:solidFill>
-              </a:defRPr>
-            </a:pPr>
-            <a:r>
-              <a:t>•  Commercial platforms (OLX, Amazon) cannot deliver within 1 hour before an exam and charge high delivery fees.</a:t>
-            </a:r>
-          </a:p>
-          <a:p>
-            <a:pPr>
-              <a:spcAft>
-                <a:spcPts val="800"/>
-              </a:spcAft>
-              <a:defRPr sz="1300">
-                <a:solidFill>
-                  <a:srgbClr val="0F172A"/>
-                </a:solidFill>
-              </a:defRPr>
-            </a:pPr>
-            <a:r>
-              <a:t>•  A hyper-local, instant campus-exclusive exchange with an 'Emergency Exam SOS Mode' is urgently needed.</a:t>
+              <a:t>The Untapped Senior Resource Pool</a:t>
+            </a:r>
+          </a:p>
+          <a:p>
+            <a:pPr>
+              <a:spcAft>
+                <a:spcPts val="900"/>
+              </a:spcAft>
+              <a:defRPr sz="1200">
+                <a:solidFill>
+                  <a:srgbClr val="0F172A"/>
+                </a:solidFill>
+              </a:defRPr>
+            </a:pPr>
+            <a:r>
+              <a:t>•  Hostel Storage Inefficiencies: Seniors across 3rd and 4th year possess functional calculators, drafting gear, and books with no easy transfer channel.</a:t>
+            </a:r>
+          </a:p>
+          <a:p>
+            <a:pPr>
+              <a:spcAft>
+                <a:spcPts val="900"/>
+              </a:spcAft>
+              <a:defRPr sz="1200">
+                <a:solidFill>
+                  <a:srgbClr val="0F172A"/>
+                </a:solidFill>
+              </a:defRPr>
+            </a:pPr>
+            <a:r>
+              <a:t>•  Informal Communication Decay: Announcements posted on general batch WhatsApp or Telegram chats rapidly submerge beneath hundreds of unrelated texts.</a:t>
+            </a:r>
+          </a:p>
+          <a:p>
+            <a:pPr>
+              <a:spcAft>
+                <a:spcPts val="900"/>
+              </a:spcAft>
+              <a:defRPr sz="1200">
+                <a:solidFill>
+                  <a:srgbClr val="0F172A"/>
+                </a:solidFill>
+              </a:defRPr>
+            </a:pPr>
+            <a:r>
+              <a:t>•  Commercial Marketplace Shortcomings: External e-commerce platforms incur heavy delivery fees, courier waiting periods, and expose students to strangers.</a:t>
+            </a:r>
+          </a:p>
+          <a:p>
+            <a:pPr>
+              <a:spcAft>
+                <a:spcPts val="900"/>
+              </a:spcAft>
+              <a:defRPr sz="1200">
+                <a:solidFill>
+                  <a:srgbClr val="0F172A"/>
+                </a:solidFill>
+              </a:defRPr>
+            </a:pPr>
+            <a:r>
+              <a:t>•  The Design Opportunity: A campus-exclusive, verified exchange platform enabling immediate, zero-fee physical handovers.</a:t>
             </a:r>
           </a:p>
         </p:txBody>
@@ -6574,7 +6436,7 @@
         </p:nvSpPr>
         <p:spPr>
           <a:xfrm>
-            <a:off x="731520" y="365760"/>
+            <a:off x="731520" y="502920"/>
             <a:ext cx="10728655" cy="1005840"/>
           </a:xfrm>
           <a:prstGeom prst="rect">
@@ -6589,9 +6451,12 @@
           <a:lstStyle/>
           <a:p>
             <a:pPr>
+              <a:spcAft>
+                <a:spcPts val="200"/>
+              </a:spcAft>
               <a:defRPr sz="1100" b="1">
                 <a:solidFill>
-                  <a:srgbClr val="2563EB"/>
+                  <a:srgbClr val="0071E3"/>
                 </a:solidFill>
               </a:defRPr>
             </a:pPr>
@@ -6621,8 +6486,8 @@
         </p:nvSpPr>
         <p:spPr>
           <a:xfrm>
-            <a:off x="731520" y="1280160"/>
-            <a:ext cx="10728655" cy="36576"/>
+            <a:off x="731520" y="1371600"/>
+            <a:ext cx="10728655" cy="22860"/>
           </a:xfrm>
           <a:prstGeom prst="rect">
             <a:avLst/>
@@ -6631,9 +6496,7 @@
             <a:srgbClr val="2563EB"/>
           </a:solidFill>
           <a:ln>
-            <a:solidFill>
-              <a:srgbClr val="2563EB"/>
-            </a:solidFill>
+            <a:noFill/>
           </a:ln>
         </p:spPr>
         <p:style>
@@ -6666,14 +6529,14 @@
         </p:nvSpPr>
         <p:spPr>
           <a:xfrm>
-            <a:off x="731520" y="1554480"/>
-            <a:ext cx="5120640" cy="4846320"/>
+            <a:off x="731520" y="1600200"/>
+            <a:ext cx="5166360" cy="4709160"/>
           </a:xfrm>
           <a:prstGeom prst="roundRect">
             <a:avLst/>
           </a:prstGeom>
           <a:solidFill>
-            <a:srgbClr val="F1F5F9"/>
+            <a:srgbClr val="F8FAFC"/>
           </a:solidFill>
           <a:ln>
             <a:solidFill>
@@ -6696,10 +6559,13 @@
           </a:fontRef>
         </p:style>
         <p:txBody>
-          <a:bodyPr rtlCol="0" anchor="ctr" wrap="square"/>
+          <a:bodyPr rtlCol="0" anchor="ctr" wrap="square" lIns="320040" rIns="320040" tIns="292608" bIns="292608"/>
           <a:lstStyle/>
           <a:p>
             <a:pPr algn="ctr">
+              <a:spcAft>
+                <a:spcPts val="1200"/>
+              </a:spcAft>
               <a:defRPr sz="1600" b="1">
                 <a:solidFill>
                   <a:srgbClr val="2563EB"/>
@@ -6713,61 +6579,61 @@
           <a:p>
             <a:pPr>
               <a:spcAft>
-                <a:spcPts val="800"/>
-              </a:spcAft>
-              <a:defRPr sz="1300">
-                <a:solidFill>
-                  <a:srgbClr val="0F172A"/>
-                </a:solidFill>
-              </a:defRPr>
-            </a:pPr>
-            <a:r>
-              <a:t>•  GitHub Open Source Repositories: Analyzed 'abhraneel2004/CampusExchange', 'yadavaman13/PustakMart', and 'OpenLake/Campus-Marketplace'.</a:t>
-            </a:r>
-          </a:p>
-          <a:p>
-            <a:pPr>
-              <a:spcAft>
-                <a:spcPts val="800"/>
-              </a:spcAft>
-              <a:defRPr sz="1300">
-                <a:solidFill>
-                  <a:srgbClr val="0F172A"/>
-                </a:solidFill>
-              </a:defRPr>
-            </a:pPr>
-            <a:r>
-              <a:t>•  Strengths of existing projects: Verified that student-to-student exchange has strong organic traction.</a:t>
-            </a:r>
-          </a:p>
-          <a:p>
-            <a:pPr>
-              <a:spcAft>
-                <a:spcPts val="800"/>
-              </a:spcAft>
-              <a:defRPr sz="1300">
-                <a:solidFill>
-                  <a:srgbClr val="0F172A"/>
-                </a:solidFill>
-              </a:defRPr>
-            </a:pPr>
-            <a:r>
-              <a:t>•  Limitations identified: Most existing platforms only offer permanent 'Sell' options, completely missing 'Free Semester Borrowing' and 'Weekly Exam Rentals'.</a:t>
-            </a:r>
-          </a:p>
-          <a:p>
-            <a:pPr>
-              <a:spcAft>
-                <a:spcPts val="800"/>
-              </a:spcAft>
-              <a:defRPr sz="1300">
-                <a:solidFill>
-                  <a:srgbClr val="0F172A"/>
-                </a:solidFill>
-              </a:defRPr>
-            </a:pPr>
-            <a:r>
-              <a:t>•  Commercial Apps (OLX, Amazon Used): Lack college email verification, incur high delivery fees, and expose students to unverified external strangers.</a:t>
+                <a:spcPts val="900"/>
+              </a:spcAft>
+              <a:defRPr sz="1200">
+                <a:solidFill>
+                  <a:srgbClr val="0F172A"/>
+                </a:solidFill>
+              </a:defRPr>
+            </a:pPr>
+            <a:r>
+              <a:t>•  Academic Open-Source Audits: Benchmarked existing student exchange repositories, confirming strong student demand for local resource reuse.</a:t>
+            </a:r>
+          </a:p>
+          <a:p>
+            <a:pPr>
+              <a:spcAft>
+                <a:spcPts val="900"/>
+              </a:spcAft>
+              <a:defRPr sz="1200">
+                <a:solidFill>
+                  <a:srgbClr val="0F172A"/>
+                </a:solidFill>
+              </a:defRPr>
+            </a:pPr>
+            <a:r>
+              <a:t>•  Architectural Gap: Existing marketplace platforms focus almost exclusively on permanent resale, completely overlooking free semester borrowing and short-term examination rentals.</a:t>
+            </a:r>
+          </a:p>
+          <a:p>
+            <a:pPr>
+              <a:spcAft>
+                <a:spcPts val="900"/>
+              </a:spcAft>
+              <a:defRPr sz="1200">
+                <a:solidFill>
+                  <a:srgbClr val="0F172A"/>
+                </a:solidFill>
+              </a:defRPr>
+            </a:pPr>
+            <a:r>
+              <a:t>•  Commercial Classifieds (OLX, Amazon Used): Lack institutional domain verification, charge transaction commissions, and fail to prevent external fraud.</a:t>
+            </a:r>
+          </a:p>
+          <a:p>
+            <a:pPr>
+              <a:spcAft>
+                <a:spcPts val="900"/>
+              </a:spcAft>
+              <a:defRPr sz="1200">
+                <a:solidFill>
+                  <a:srgbClr val="0F172A"/>
+                </a:solidFill>
+              </a:defRPr>
+            </a:pPr>
+            <a:r>
+              <a:t>•  Privacy Hazards: External marketplaces expose students' personal phone numbers to unregulated public scrapers.</a:t>
             </a:r>
           </a:p>
         </p:txBody>
@@ -6780,14 +6646,14 @@
         </p:nvSpPr>
         <p:spPr>
           <a:xfrm>
-            <a:off x="6309360" y="1554480"/>
-            <a:ext cx="5120640" cy="4846320"/>
+            <a:off x="6291072" y="1600200"/>
+            <a:ext cx="5166360" cy="4709160"/>
           </a:xfrm>
           <a:prstGeom prst="roundRect">
             <a:avLst/>
           </a:prstGeom>
           <a:solidFill>
-            <a:srgbClr val="F1F5F9"/>
+            <a:srgbClr val="F8FAFC"/>
           </a:solidFill>
           <a:ln>
             <a:solidFill>
@@ -6810,10 +6676,13 @@
           </a:fontRef>
         </p:style>
         <p:txBody>
-          <a:bodyPr rtlCol="0" anchor="ctr" wrap="square"/>
+          <a:bodyPr rtlCol="0" anchor="ctr" wrap="square" lIns="320040" rIns="320040" tIns="292608" bIns="292608"/>
           <a:lstStyle/>
           <a:p>
             <a:pPr algn="ctr">
+              <a:spcAft>
+                <a:spcPts val="1200"/>
+              </a:spcAft>
               <a:defRPr sz="1600" b="1">
                 <a:solidFill>
                   <a:srgbClr val="2563EB"/>
@@ -6827,46 +6696,46 @@
           <a:p>
             <a:pPr>
               <a:spcAft>
-                <a:spcPts val="800"/>
-              </a:spcAft>
-              <a:defRPr sz="1300">
-                <a:solidFill>
-                  <a:srgbClr val="0F172A"/>
-                </a:solidFill>
-              </a:defRPr>
-            </a:pPr>
-            <a:r>
-              <a:t>•  US Patent US8626601B2 ('Campus Marketplace with User Verification'): Emphasizes that closed educational domains have a 92% higher completion rate for transactions.</a:t>
-            </a:r>
-          </a:p>
-          <a:p>
-            <a:pPr>
-              <a:spcAft>
-                <a:spcPts val="800"/>
-              </a:spcAft>
-              <a:defRPr sz="1300">
-                <a:solidFill>
-                  <a:srgbClr val="0F172A"/>
-                </a:solidFill>
-              </a:defRPr>
-            </a:pPr>
-            <a:r>
-              <a:t>•  IEEE Study on Circular Campus Economies (2023): Demonstrates that textbook reuse saves an average of 4.2 kg CO2 equivalent per student per academic year.</a:t>
-            </a:r>
-          </a:p>
-          <a:p>
-            <a:pPr>
-              <a:spcAft>
-                <a:spcPts val="800"/>
-              </a:spcAft>
-              <a:defRPr sz="1300">
-                <a:solidFill>
-                  <a:srgbClr val="0F172A"/>
-                </a:solidFill>
-              </a:defRPr>
-            </a:pPr>
-            <a:r>
-              <a:t>•  Key Innovation in CampusShare: Tri-modal transactions (Borrow for Free, Rent by Week, or Buy at 75% Off) tied directly to campus landmark handovers.</a:t>
+                <a:spcPts val="900"/>
+              </a:spcAft>
+              <a:defRPr sz="1200">
+                <a:solidFill>
+                  <a:srgbClr val="0F172A"/>
+                </a:solidFill>
+              </a:defRPr>
+            </a:pPr>
+            <a:r>
+              <a:t>•  User Authentication Patents: Review of educational marketplace IP highlights that closed university email domains deliver significantly higher peer trust and completed exchanges.</a:t>
+            </a:r>
+          </a:p>
+          <a:p>
+            <a:pPr>
+              <a:spcAft>
+                <a:spcPts val="900"/>
+              </a:spcAft>
+              <a:defRPr sz="1200">
+                <a:solidFill>
+                  <a:srgbClr val="0F172A"/>
+                </a:solidFill>
+              </a:defRPr>
+            </a:pPr>
+            <a:r>
+              <a:t>•  Circular Campus Economy Studies: Published research confirms that structured textbook and instrument reuse materially reduces solid waste and production carbon footprint.</a:t>
+            </a:r>
+          </a:p>
+          <a:p>
+            <a:pPr>
+              <a:spcAft>
+                <a:spcPts val="900"/>
+              </a:spcAft>
+              <a:defRPr sz="1200">
+                <a:solidFill>
+                  <a:srgbClr val="0F172A"/>
+                </a:solidFill>
+              </a:defRPr>
+            </a:pPr>
+            <a:r>
+              <a:t>•  Core Design Synthesis: CampusShare bridges these limitations via a tri-modal framework (Free Borrow, Low-Cost Rent, Deep-Discount Purchase) tied to physical campus landmarks.</a:t>
             </a:r>
           </a:p>
         </p:txBody>
@@ -6897,7 +6766,7 @@
         </p:nvSpPr>
         <p:spPr>
           <a:xfrm>
-            <a:off x="731520" y="365760"/>
+            <a:off x="731520" y="502920"/>
             <a:ext cx="10728655" cy="1005840"/>
           </a:xfrm>
           <a:prstGeom prst="rect">
@@ -6912,9 +6781,12 @@
           <a:lstStyle/>
           <a:p>
             <a:pPr>
+              <a:spcAft>
+                <a:spcPts val="200"/>
+              </a:spcAft>
               <a:defRPr sz="1100" b="1">
                 <a:solidFill>
-                  <a:srgbClr val="2563EB"/>
+                  <a:srgbClr val="0071E3"/>
                 </a:solidFill>
               </a:defRPr>
             </a:pPr>
@@ -6944,8 +6816,8 @@
         </p:nvSpPr>
         <p:spPr>
           <a:xfrm>
-            <a:off x="731520" y="1280160"/>
-            <a:ext cx="10728655" cy="36576"/>
+            <a:off x="731520" y="1371600"/>
+            <a:ext cx="10728655" cy="22860"/>
           </a:xfrm>
           <a:prstGeom prst="rect">
             <a:avLst/>
@@ -6954,9 +6826,7 @@
             <a:srgbClr val="2563EB"/>
           </a:solidFill>
           <a:ln>
-            <a:solidFill>
-              <a:srgbClr val="2563EB"/>
-            </a:solidFill>
+            <a:noFill/>
           </a:ln>
         </p:spPr>
         <p:style>
@@ -6996,7 +6866,7 @@
             <a:avLst/>
           </a:prstGeom>
           <a:solidFill>
-            <a:srgbClr val="F1F5F9"/>
+            <a:srgbClr val="F8FAFC"/>
           </a:solidFill>
           <a:ln>
             <a:solidFill>
@@ -7019,11 +6889,14 @@
           </a:fontRef>
         </p:style>
         <p:txBody>
-          <a:bodyPr rtlCol="0" anchor="ctr" wrap="square"/>
+          <a:bodyPr rtlCol="0" anchor="ctr" wrap="square" lIns="164592" rIns="164592" tIns="201168" bIns="201168"/>
           <a:lstStyle/>
           <a:p>
             <a:pPr algn="ctr">
-              <a:defRPr sz="1400" b="1">
+              <a:spcAft>
+                <a:spcPts val="400"/>
+              </a:spcAft>
+              <a:defRPr sz="1350" b="1">
                 <a:solidFill>
                   <a:srgbClr val="2563EB"/>
                 </a:solidFill>
@@ -7038,7 +6911,7 @@
               <a:spcBef>
                 <a:spcPts val="600"/>
               </a:spcBef>
-              <a:defRPr sz="1100" b="1">
+              <a:defRPr sz="1050" b="1">
                 <a:solidFill>
                   <a:srgbClr val="64748B"/>
                 </a:solidFill>
@@ -7050,14 +6923,14 @@
           </a:p>
           <a:p>
             <a:pPr>
-              <a:defRPr sz="1100">
-                <a:solidFill>
-                  <a:srgbClr val="0F172A"/>
-                </a:solidFill>
-              </a:defRPr>
-            </a:pPr>
-            <a:r>
-              <a:t>First week of classes</a:t>
+              <a:defRPr sz="1050">
+                <a:solidFill>
+                  <a:srgbClr val="0F172A"/>
+                </a:solidFill>
+              </a:defRPr>
+            </a:pPr>
+            <a:r>
+              <a:t>Syllabus Release</a:t>
             </a:r>
           </a:p>
           <a:p>
@@ -7065,7 +6938,7 @@
               <a:spcBef>
                 <a:spcPts val="600"/>
               </a:spcBef>
-              <a:defRPr sz="1100" b="1">
+              <a:defRPr sz="1050" b="1">
                 <a:solidFill>
                   <a:srgbClr val="64748B"/>
                 </a:solidFill>
@@ -7077,14 +6950,14 @@
           </a:p>
           <a:p>
             <a:pPr>
-              <a:defRPr sz="1100">
-                <a:solidFill>
-                  <a:srgbClr val="0F172A"/>
-                </a:solidFill>
-              </a:defRPr>
-            </a:pPr>
-            <a:r>
-              <a:t>Reads syllabus; told to buy ₹1,400 Casio calc &amp; ₹850 textbook</a:t>
+              <a:defRPr sz="1050">
+                <a:solidFill>
+                  <a:srgbClr val="0F172A"/>
+                </a:solidFill>
+              </a:defRPr>
+            </a:pPr>
+            <a:r>
+              <a:t>Receives course syllabus requiring specialized calculators and expensive course reference textbooks.</a:t>
             </a:r>
           </a:p>
           <a:p>
@@ -7092,7 +6965,7 @@
               <a:spcBef>
                 <a:spcPts val="600"/>
               </a:spcBef>
-              <a:defRPr sz="1100" b="1">
+              <a:defRPr sz="1050" b="1">
                 <a:solidFill>
                   <a:srgbClr val="64748B"/>
                 </a:solidFill>
@@ -7104,7 +6977,7 @@
           </a:p>
           <a:p>
             <a:pPr>
-              <a:defRPr sz="1100">
+              <a:defRPr sz="1050">
                 <a:solidFill>
                   <a:srgbClr val="0F172A"/>
                 </a:solidFill>
@@ -7119,7 +6992,7 @@
               <a:spcBef>
                 <a:spcPts val="600"/>
               </a:spcBef>
-              <a:defRPr sz="1100" b="1">
+              <a:defRPr sz="1050" b="1">
                 <a:solidFill>
                   <a:srgbClr val="64748B"/>
                 </a:solidFill>
@@ -7131,14 +7004,14 @@
           </a:p>
           <a:p>
             <a:pPr>
-              <a:defRPr sz="1100">
-                <a:solidFill>
-                  <a:srgbClr val="0F172A"/>
-                </a:solidFill>
-              </a:defRPr>
-            </a:pPr>
-            <a:r>
-              <a:t>No budget for single-term items</a:t>
+              <a:defRPr sz="1050">
+                <a:solidFill>
+                  <a:srgbClr val="0F172A"/>
+                </a:solidFill>
+              </a:defRPr>
+            </a:pPr>
+            <a:r>
+              <a:t>Heavy unexpected expense for single-semester coursework.</a:t>
             </a:r>
           </a:p>
         </p:txBody>
@@ -7158,7 +7031,7 @@
             <a:avLst/>
           </a:prstGeom>
           <a:solidFill>
-            <a:srgbClr val="F1F5F9"/>
+            <a:srgbClr val="F8FAFC"/>
           </a:solidFill>
           <a:ln>
             <a:solidFill>
@@ -7181,11 +7054,14 @@
           </a:fontRef>
         </p:style>
         <p:txBody>
-          <a:bodyPr rtlCol="0" anchor="ctr" wrap="square"/>
+          <a:bodyPr rtlCol="0" anchor="ctr" wrap="square" lIns="164592" rIns="164592" tIns="201168" bIns="201168"/>
           <a:lstStyle/>
           <a:p>
             <a:pPr algn="ctr">
-              <a:defRPr sz="1400" b="1">
+              <a:spcAft>
+                <a:spcPts val="400"/>
+              </a:spcAft>
+              <a:defRPr sz="1350" b="1">
                 <a:solidFill>
                   <a:srgbClr val="2563EB"/>
                 </a:solidFill>
@@ -7200,7 +7076,7 @@
               <a:spcBef>
                 <a:spcPts val="600"/>
               </a:spcBef>
-              <a:defRPr sz="1100" b="1">
+              <a:defRPr sz="1050" b="1">
                 <a:solidFill>
                   <a:srgbClr val="64748B"/>
                 </a:solidFill>
@@ -7212,14 +7088,14 @@
           </a:p>
           <a:p>
             <a:pPr>
-              <a:defRPr sz="1100">
-                <a:solidFill>
-                  <a:srgbClr val="0F172A"/>
-                </a:solidFill>
-              </a:defRPr>
-            </a:pPr>
-            <a:r>
-              <a:t>Informal social media</a:t>
+              <a:defRPr sz="1050">
+                <a:solidFill>
+                  <a:srgbClr val="0F172A"/>
+                </a:solidFill>
+              </a:defRPr>
+            </a:pPr>
+            <a:r>
+              <a:t>Batch WhatsApp</a:t>
             </a:r>
           </a:p>
           <a:p>
@@ -7227,7 +7103,7 @@
               <a:spcBef>
                 <a:spcPts val="600"/>
               </a:spcBef>
-              <a:defRPr sz="1100" b="1">
+              <a:defRPr sz="1050" b="1">
                 <a:solidFill>
                   <a:srgbClr val="64748B"/>
                 </a:solidFill>
@@ -7239,14 +7115,14 @@
           </a:p>
           <a:p>
             <a:pPr>
-              <a:defRPr sz="1100">
-                <a:solidFill>
-                  <a:srgbClr val="0F172A"/>
-                </a:solidFill>
-              </a:defRPr>
-            </a:pPr>
-            <a:r>
-              <a:t>Posts in college WhatsApp group; asks hostel wingmates</a:t>
+              <a:defRPr sz="1050">
+                <a:solidFill>
+                  <a:srgbClr val="0F172A"/>
+                </a:solidFill>
+              </a:defRPr>
+            </a:pPr>
+            <a:r>
+              <a:t>Posts queries in crowded batch groups; inquires across hostel wings for available copies.</a:t>
             </a:r>
           </a:p>
           <a:p>
@@ -7254,7 +7130,7 @@
               <a:spcBef>
                 <a:spcPts val="600"/>
               </a:spcBef>
-              <a:defRPr sz="1100" b="1">
+              <a:defRPr sz="1050" b="1">
                 <a:solidFill>
                   <a:srgbClr val="64748B"/>
                 </a:solidFill>
@@ -7266,7 +7142,7 @@
           </a:p>
           <a:p>
             <a:pPr>
-              <a:defRPr sz="1100">
+              <a:defRPr sz="1050">
                 <a:solidFill>
                   <a:srgbClr val="0F172A"/>
                 </a:solidFill>
@@ -7281,7 +7157,7 @@
               <a:spcBef>
                 <a:spcPts val="600"/>
               </a:spcBef>
-              <a:defRPr sz="1100" b="1">
+              <a:defRPr sz="1050" b="1">
                 <a:solidFill>
                   <a:srgbClr val="64748B"/>
                 </a:solidFill>
@@ -7293,14 +7169,14 @@
           </a:p>
           <a:p>
             <a:pPr>
-              <a:defRPr sz="1100">
-                <a:solidFill>
-                  <a:srgbClr val="0F172A"/>
-                </a:solidFill>
-              </a:defRPr>
-            </a:pPr>
-            <a:r>
-              <a:t>Message drowned by 300 group texts</a:t>
+              <a:defRPr sz="1050">
+                <a:solidFill>
+                  <a:srgbClr val="0F172A"/>
+                </a:solidFill>
+              </a:defRPr>
+            </a:pPr>
+            <a:r>
+              <a:t>Inquiries rapidly drown under relentless casual chatter and meme spam.</a:t>
             </a:r>
           </a:p>
         </p:txBody>
@@ -7320,7 +7196,7 @@
             <a:avLst/>
           </a:prstGeom>
           <a:solidFill>
-            <a:srgbClr val="F1F5F9"/>
+            <a:srgbClr val="F8FAFC"/>
           </a:solidFill>
           <a:ln>
             <a:solidFill>
@@ -7343,18 +7219,21 @@
           </a:fontRef>
         </p:style>
         <p:txBody>
-          <a:bodyPr rtlCol="0" anchor="ctr" wrap="square"/>
+          <a:bodyPr rtlCol="0" anchor="ctr" wrap="square" lIns="164592" rIns="164592" tIns="201168" bIns="201168"/>
           <a:lstStyle/>
           <a:p>
             <a:pPr algn="ctr">
-              <a:defRPr sz="1400" b="1">
+              <a:spcAft>
+                <a:spcPts val="400"/>
+              </a:spcAft>
+              <a:defRPr sz="1350" b="1">
                 <a:solidFill>
                   <a:srgbClr val="2563EB"/>
                 </a:solidFill>
               </a:defRPr>
             </a:pPr>
             <a:r>
-              <a:t>3. Negotiations</a:t>
+              <a:t>3. Negotiation</a:t>
             </a:r>
           </a:p>
           <a:p>
@@ -7362,7 +7241,7 @@
               <a:spcBef>
                 <a:spcPts val="600"/>
               </a:spcBef>
-              <a:defRPr sz="1100" b="1">
+              <a:defRPr sz="1050" b="1">
                 <a:solidFill>
                   <a:srgbClr val="64748B"/>
                 </a:solidFill>
@@ -7374,14 +7253,14 @@
           </a:p>
           <a:p>
             <a:pPr>
-              <a:defRPr sz="1100">
-                <a:solidFill>
-                  <a:srgbClr val="0F172A"/>
-                </a:solidFill>
-              </a:defRPr>
-            </a:pPr>
-            <a:r>
-              <a:t>Direct DM / Chat</a:t>
+              <a:defRPr sz="1050">
+                <a:solidFill>
+                  <a:srgbClr val="0F172A"/>
+                </a:solidFill>
+              </a:defRPr>
+            </a:pPr>
+            <a:r>
+              <a:t>Private Chat DMs</a:t>
             </a:r>
           </a:p>
           <a:p>
@@ -7389,7 +7268,7 @@
               <a:spcBef>
                 <a:spcPts val="600"/>
               </a:spcBef>
-              <a:defRPr sz="1100" b="1">
+              <a:defRPr sz="1050" b="1">
                 <a:solidFill>
                   <a:srgbClr val="64748B"/>
                 </a:solidFill>
@@ -7401,14 +7280,14 @@
           </a:p>
           <a:p>
             <a:pPr>
-              <a:defRPr sz="1100">
-                <a:solidFill>
-                  <a:srgbClr val="0F172A"/>
-                </a:solidFill>
-              </a:defRPr>
-            </a:pPr>
-            <a:r>
-              <a:t>Finds a senior with the book; tries to agree on price &amp; spot</a:t>
+              <a:defRPr sz="1050">
+                <a:solidFill>
+                  <a:srgbClr val="0F172A"/>
+                </a:solidFill>
+              </a:defRPr>
+            </a:pPr>
+            <a:r>
+              <a:t>Identifies a potential senior seller; attempts to agree on price, item state, and meeting time.</a:t>
             </a:r>
           </a:p>
           <a:p>
@@ -7416,7 +7295,7 @@
               <a:spcBef>
                 <a:spcPts val="600"/>
               </a:spcBef>
-              <a:defRPr sz="1100" b="1">
+              <a:defRPr sz="1050" b="1">
                 <a:solidFill>
                   <a:srgbClr val="64748B"/>
                 </a:solidFill>
@@ -7428,7 +7307,7 @@
           </a:p>
           <a:p>
             <a:pPr>
-              <a:defRPr sz="1100">
+              <a:defRPr sz="1050">
                 <a:solidFill>
                   <a:srgbClr val="0F172A"/>
                 </a:solidFill>
@@ -7443,7 +7322,7 @@
               <a:spcBef>
                 <a:spcPts val="600"/>
               </a:spcBef>
-              <a:defRPr sz="1100" b="1">
+              <a:defRPr sz="1050" b="1">
                 <a:solidFill>
                   <a:srgbClr val="64748B"/>
                 </a:solidFill>
@@ -7455,14 +7334,14 @@
           </a:p>
           <a:p>
             <a:pPr>
-              <a:defRPr sz="1100">
-                <a:solidFill>
-                  <a:srgbClr val="0F172A"/>
-                </a:solidFill>
-              </a:defRPr>
-            </a:pPr>
-            <a:r>
-              <a:t>Senior forgets to bring book; no deposit safety</a:t>
+              <a:defRPr sz="1050">
+                <a:solidFill>
+                  <a:srgbClr val="0F172A"/>
+                </a:solidFill>
+              </a:defRPr>
+            </a:pPr>
+            <a:r>
+              <a:t>Senior forgets to bring item; lack of transparent pricing and deposit safety.</a:t>
             </a:r>
           </a:p>
         </p:txBody>
@@ -7482,7 +7361,7 @@
             <a:avLst/>
           </a:prstGeom>
           <a:solidFill>
-            <a:srgbClr val="F1F5F9"/>
+            <a:srgbClr val="F8FAFC"/>
           </a:solidFill>
           <a:ln>
             <a:solidFill>
@@ -7505,18 +7384,21 @@
           </a:fontRef>
         </p:style>
         <p:txBody>
-          <a:bodyPr rtlCol="0" anchor="ctr" wrap="square"/>
+          <a:bodyPr rtlCol="0" anchor="ctr" wrap="square" lIns="164592" rIns="164592" tIns="201168" bIns="201168"/>
           <a:lstStyle/>
           <a:p>
             <a:pPr algn="ctr">
-              <a:defRPr sz="1400" b="1">
+              <a:spcAft>
+                <a:spcPts val="400"/>
+              </a:spcAft>
+              <a:defRPr sz="1350" b="1">
                 <a:solidFill>
                   <a:srgbClr val="2563EB"/>
                 </a:solidFill>
               </a:defRPr>
             </a:pPr>
             <a:r>
-              <a:t>4. Campus Handover</a:t>
+              <a:t>4. Handover</a:t>
             </a:r>
           </a:p>
           <a:p>
@@ -7524,7 +7406,7 @@
               <a:spcBef>
                 <a:spcPts val="600"/>
               </a:spcBef>
-              <a:defRPr sz="1100" b="1">
+              <a:defRPr sz="1050" b="1">
                 <a:solidFill>
                   <a:srgbClr val="64748B"/>
                 </a:solidFill>
@@ -7536,14 +7418,14 @@
           </a:p>
           <a:p>
             <a:pPr>
-              <a:defRPr sz="1100">
-                <a:solidFill>
-                  <a:srgbClr val="0F172A"/>
-                </a:solidFill>
-              </a:defRPr>
-            </a:pPr>
-            <a:r>
-              <a:t>Central Library / Quad</a:t>
+              <a:defRPr sz="1050">
+                <a:solidFill>
+                  <a:srgbClr val="0F172A"/>
+                </a:solidFill>
+              </a:defRPr>
+            </a:pPr>
+            <a:r>
+              <a:t>Campus Landmark</a:t>
             </a:r>
           </a:p>
           <a:p>
@@ -7551,7 +7433,7 @@
               <a:spcBef>
                 <a:spcPts val="600"/>
               </a:spcBef>
-              <a:defRPr sz="1100" b="1">
+              <a:defRPr sz="1050" b="1">
                 <a:solidFill>
                   <a:srgbClr val="64748B"/>
                 </a:solidFill>
@@ -7563,14 +7445,14 @@
           </a:p>
           <a:p>
             <a:pPr>
-              <a:defRPr sz="1100">
-                <a:solidFill>
-                  <a:srgbClr val="0F172A"/>
-                </a:solidFill>
-              </a:defRPr>
-            </a:pPr>
-            <a:r>
-              <a:t>Meets for exchange; physical inspection of book condition</a:t>
+              <a:defRPr sz="1050">
+                <a:solidFill>
+                  <a:srgbClr val="0F172A"/>
+                </a:solidFill>
+              </a:defRPr>
+            </a:pPr>
+            <a:r>
+              <a:t>Coordinates physical meetup; inspects equipment binding, keys, and functional condition.</a:t>
             </a:r>
           </a:p>
           <a:p>
@@ -7578,7 +7460,7 @@
               <a:spcBef>
                 <a:spcPts val="600"/>
               </a:spcBef>
-              <a:defRPr sz="1100" b="1">
+              <a:defRPr sz="1050" b="1">
                 <a:solidFill>
                   <a:srgbClr val="64748B"/>
                 </a:solidFill>
@@ -7590,7 +7472,7 @@
           </a:p>
           <a:p>
             <a:pPr>
-              <a:defRPr sz="1100">
+              <a:defRPr sz="1050">
                 <a:solidFill>
                   <a:srgbClr val="0F172A"/>
                 </a:solidFill>
@@ -7605,7 +7487,7 @@
               <a:spcBef>
                 <a:spcPts val="600"/>
               </a:spcBef>
-              <a:defRPr sz="1100" b="1">
+              <a:defRPr sz="1050" b="1">
                 <a:solidFill>
                   <a:srgbClr val="64748B"/>
                 </a:solidFill>
@@ -7617,14 +7499,14 @@
           </a:p>
           <a:p>
             <a:pPr>
-              <a:defRPr sz="1100">
-                <a:solidFill>
-                  <a:srgbClr val="0F172A"/>
-                </a:solidFill>
-              </a:defRPr>
-            </a:pPr>
-            <a:r>
-              <a:t>Hard to find exact meeting spot without tracker</a:t>
+              <a:defRPr sz="1050">
+                <a:solidFill>
+                  <a:srgbClr val="0F172A"/>
+                </a:solidFill>
+              </a:defRPr>
+            </a:pPr>
+            <a:r>
+              <a:t>Difficulty pinpointing exact turnstile or spot without arrival tracking.</a:t>
             </a:r>
           </a:p>
         </p:txBody>
@@ -7644,7 +7526,7 @@
             <a:avLst/>
           </a:prstGeom>
           <a:solidFill>
-            <a:srgbClr val="F1F5F9"/>
+            <a:srgbClr val="F8FAFC"/>
           </a:solidFill>
           <a:ln>
             <a:solidFill>
@@ -7667,18 +7549,21 @@
           </a:fontRef>
         </p:style>
         <p:txBody>
-          <a:bodyPr rtlCol="0" anchor="ctr" wrap="square"/>
+          <a:bodyPr rtlCol="0" anchor="ctr" wrap="square" lIns="164592" rIns="164592" tIns="201168" bIns="201168"/>
           <a:lstStyle/>
           <a:p>
             <a:pPr algn="ctr">
-              <a:defRPr sz="1400" b="1">
+              <a:spcAft>
+                <a:spcPts val="400"/>
+              </a:spcAft>
+              <a:defRPr sz="1350" b="1">
                 <a:solidFill>
                   <a:srgbClr val="2563EB"/>
                 </a:solidFill>
               </a:defRPr>
             </a:pPr>
             <a:r>
-              <a:t>5. Post-Semester</a:t>
+              <a:t>5. Post-Term</a:t>
             </a:r>
           </a:p>
           <a:p>
@@ -7686,7 +7571,7 @@
               <a:spcBef>
                 <a:spcPts val="600"/>
               </a:spcBef>
-              <a:defRPr sz="1100" b="1">
+              <a:defRPr sz="1050" b="1">
                 <a:solidFill>
                   <a:srgbClr val="64748B"/>
                 </a:solidFill>
@@ -7698,14 +7583,14 @@
           </a:p>
           <a:p>
             <a:pPr>
-              <a:defRPr sz="1100">
-                <a:solidFill>
-                  <a:srgbClr val="0F172A"/>
-                </a:solidFill>
-              </a:defRPr>
-            </a:pPr>
-            <a:r>
-              <a:t>End of semester</a:t>
+              <a:defRPr sz="1050">
+                <a:solidFill>
+                  <a:srgbClr val="0F172A"/>
+                </a:solidFill>
+              </a:defRPr>
+            </a:pPr>
+            <a:r>
+              <a:t>Semester End</a:t>
             </a:r>
           </a:p>
           <a:p>
@@ -7713,7 +7598,7 @@
               <a:spcBef>
                 <a:spcPts val="600"/>
               </a:spcBef>
-              <a:defRPr sz="1100" b="1">
+              <a:defRPr sz="1050" b="1">
                 <a:solidFill>
                   <a:srgbClr val="64748B"/>
                 </a:solidFill>
@@ -7725,14 +7610,14 @@
           </a:p>
           <a:p>
             <a:pPr>
-              <a:defRPr sz="1100">
-                <a:solidFill>
-                  <a:srgbClr val="0F172A"/>
-                </a:solidFill>
-              </a:defRPr>
-            </a:pPr>
-            <a:r>
-              <a:t>Semester ends; book sits on desk with nowhere to return/sell</a:t>
+              <a:defRPr sz="1050">
+                <a:solidFill>
+                  <a:srgbClr val="0F172A"/>
+                </a:solidFill>
+              </a:defRPr>
+            </a:pPr>
+            <a:r>
+              <a:t>Examinations finish; equipment sits idle on hostel shelf with no structured channel to hand down.</a:t>
             </a:r>
           </a:p>
           <a:p>
@@ -7740,7 +7625,7 @@
               <a:spcBef>
                 <a:spcPts val="600"/>
               </a:spcBef>
-              <a:defRPr sz="1100" b="1">
+              <a:defRPr sz="1050" b="1">
                 <a:solidFill>
                   <a:srgbClr val="64748B"/>
                 </a:solidFill>
@@ -7752,7 +7637,7 @@
           </a:p>
           <a:p>
             <a:pPr>
-              <a:defRPr sz="1100">
+              <a:defRPr sz="1050">
                 <a:solidFill>
                   <a:srgbClr val="0F172A"/>
                 </a:solidFill>
@@ -7767,7 +7652,7 @@
               <a:spcBef>
                 <a:spcPts val="600"/>
               </a:spcBef>
-              <a:defRPr sz="1100" b="1">
+              <a:defRPr sz="1050" b="1">
                 <a:solidFill>
                   <a:srgbClr val="64748B"/>
                 </a:solidFill>
@@ -7779,14 +7664,14 @@
           </a:p>
           <a:p>
             <a:pPr>
-              <a:defRPr sz="1100">
-                <a:solidFill>
-                  <a:srgbClr val="0F172A"/>
-                </a:solidFill>
-              </a:defRPr>
-            </a:pPr>
-            <a:r>
-              <a:t>Wasted investment; cycle repeats for next batch</a:t>
+              <a:defRPr sz="1050">
+                <a:solidFill>
+                  <a:srgbClr val="0F172A"/>
+                </a:solidFill>
+              </a:defRPr>
+            </a:pPr>
+            <a:r>
+              <a:t>Wasted investment; identical financial friction restarts for next incoming batch.</a:t>
             </a:r>
           </a:p>
         </p:txBody>
@@ -7817,7 +7702,7 @@
         </p:nvSpPr>
         <p:spPr>
           <a:xfrm>
-            <a:off x="731520" y="365760"/>
+            <a:off x="731520" y="502920"/>
             <a:ext cx="10728655" cy="1005840"/>
           </a:xfrm>
           <a:prstGeom prst="rect">
@@ -7832,9 +7717,12 @@
           <a:lstStyle/>
           <a:p>
             <a:pPr>
+              <a:spcAft>
+                <a:spcPts val="200"/>
+              </a:spcAft>
               <a:defRPr sz="1100" b="1">
                 <a:solidFill>
-                  <a:srgbClr val="2563EB"/>
+                  <a:srgbClr val="0071E3"/>
                 </a:solidFill>
               </a:defRPr>
             </a:pPr>
@@ -7864,8 +7752,8 @@
         </p:nvSpPr>
         <p:spPr>
           <a:xfrm>
-            <a:off x="731520" y="1280160"/>
-            <a:ext cx="10728655" cy="36576"/>
+            <a:off x="731520" y="1371600"/>
+            <a:ext cx="10728655" cy="22860"/>
           </a:xfrm>
           <a:prstGeom prst="rect">
             <a:avLst/>
@@ -7874,9 +7762,7 @@
             <a:srgbClr val="2563EB"/>
           </a:solidFill>
           <a:ln>
-            <a:solidFill>
-              <a:srgbClr val="2563EB"/>
-            </a:solidFill>
+            <a:noFill/>
           </a:ln>
         </p:spPr>
         <p:style>
@@ -7909,14 +7795,14 @@
         </p:nvSpPr>
         <p:spPr>
           <a:xfrm>
-            <a:off x="731520" y="1554480"/>
-            <a:ext cx="5120640" cy="4846320"/>
+            <a:off x="731520" y="1600200"/>
+            <a:ext cx="5166360" cy="4709160"/>
           </a:xfrm>
           <a:prstGeom prst="roundRect">
             <a:avLst/>
           </a:prstGeom>
           <a:solidFill>
-            <a:srgbClr val="F1F5F9"/>
+            <a:srgbClr val="F8FAFC"/>
           </a:solidFill>
           <a:ln>
             <a:solidFill>
@@ -7939,10 +7825,13 @@
           </a:fontRef>
         </p:style>
         <p:txBody>
-          <a:bodyPr rtlCol="0" anchor="ctr" wrap="square"/>
+          <a:bodyPr rtlCol="0" anchor="ctr" wrap="square" lIns="320040" rIns="320040" tIns="292608" bIns="292608"/>
           <a:lstStyle/>
           <a:p>
             <a:pPr algn="ctr">
+              <a:spcAft>
+                <a:spcPts val="1200"/>
+              </a:spcAft>
               <a:defRPr sz="1600" b="1">
                 <a:solidFill>
                   <a:srgbClr val="2563EB"/>
@@ -7956,77 +7845,77 @@
           <a:p>
             <a:pPr>
               <a:spcAft>
-                <a:spcPts val="800"/>
-              </a:spcAft>
-              <a:defRPr sz="1300">
-                <a:solidFill>
-                  <a:srgbClr val="0F172A"/>
-                </a:solidFill>
-              </a:defRPr>
-            </a:pPr>
-            <a:r>
-              <a:t>•  Case 1 (Accidental Duplicate Orders):</a:t>
+                <a:spcPts val="900"/>
+              </a:spcAft>
+              <a:defRPr sz="1200">
+                <a:solidFill>
+                  <a:srgbClr val="0F172A"/>
+                </a:solidFill>
+              </a:defRPr>
+            </a:pPr>
+            <a:r>
+              <a:t>•  Duplicate Online Orders:</a:t>
             </a:r>
             <a:br/>
             <a:r>
-              <a:t>Student 'Jayan' posted Dyazo 13.6" MacBook cover (ordered 2 by mistake on Amazon for ₹579) seeking peer resale.</a:t>
-            </a:r>
-          </a:p>
-          <a:p>
-            <a:pPr>
-              <a:spcAft>
-                <a:spcPts val="800"/>
-              </a:spcAft>
-              <a:defRPr sz="1300">
-                <a:solidFill>
-                  <a:srgbClr val="0F172A"/>
-                </a:solidFill>
-              </a:defRPr>
-            </a:pPr>
-            <a:r>
-              <a:t>•  Case 2 (Midnight Perishable Food):</a:t>
+              <a:t>Student Peer (2nd Yr IT) posted a sealed laptop protective case seeking peer resale after an accidental duplicate e-commerce shipment.</a:t>
+            </a:r>
+          </a:p>
+          <a:p>
+            <a:pPr>
+              <a:spcAft>
+                <a:spcPts val="900"/>
+              </a:spcAft>
+              <a:defRPr sz="1200">
+                <a:solidFill>
+                  <a:srgbClr val="0F172A"/>
+                </a:solidFill>
+              </a:defRPr>
+            </a:pPr>
+            <a:r>
+              <a:t>•  Midnight Perishable Food Surplus:</a:t>
             </a:r>
             <a:br/>
             <a:r>
-              <a:t>Student 'Yash' posted egg parathas with chutney pouches at 3:25 AM (₹80) to avoid throwing away fresh food.</a:t>
-            </a:r>
-          </a:p>
-          <a:p>
-            <a:pPr>
-              <a:spcAft>
-                <a:spcPts val="800"/>
-              </a:spcAft>
-              <a:defRPr sz="1300">
-                <a:solidFill>
-                  <a:srgbClr val="0F172A"/>
-                </a:solidFill>
-              </a:defRPr>
-            </a:pPr>
-            <a:r>
-              <a:t>•  Case 3 (Hostel Pantry &amp; Sealed Food):</a:t>
+              <a:t>Hostel Resident (Block 2) posted fresh evening food parcels late at night to prevent discarding hot, edible meals.</a:t>
+            </a:r>
+          </a:p>
+          <a:p>
+            <a:pPr>
+              <a:spcAft>
+                <a:spcPts val="900"/>
+              </a:spcAft>
+              <a:defRPr sz="1200">
+                <a:solidFill>
+                  <a:srgbClr val="0F172A"/>
+                </a:solidFill>
+              </a:defRPr>
+            </a:pPr>
+            <a:r>
+              <a:t>•  Surplus Hostel Pantry Stock:</a:t>
             </a:r>
             <a:br/>
             <a:r>
-              <a:t>Student 'Apoorva' listed sealed 700g Yoga Bar Super Muesli (₹250) due to excess pantry stock.</a:t>
-            </a:r>
-          </a:p>
-          <a:p>
-            <a:pPr>
-              <a:spcAft>
-                <a:spcPts val="800"/>
-              </a:spcAft>
-              <a:defRPr sz="1300">
-                <a:solidFill>
-                  <a:srgbClr val="0F172A"/>
-                </a:solidFill>
-              </a:defRPr>
-            </a:pPr>
-            <a:r>
-              <a:t>•  Case 4 (Fitness &amp; Supplements):</a:t>
+              <a:t>Hostel Resident (Block A) listed sealed packaged muesli and dry snacks due to surplus personal grocery purchases.</a:t>
+            </a:r>
+          </a:p>
+          <a:p>
+            <a:pPr>
+              <a:spcAft>
+                <a:spcPts val="900"/>
+              </a:spcAft>
+              <a:defRPr sz="1200">
+                <a:solidFill>
+                  <a:srgbClr val="0F172A"/>
+                </a:solidFill>
+              </a:defRPr>
+            </a:pPr>
+            <a:r>
+              <a:t>•  Specialized Fitness Supplies:</a:t>
             </a:r>
             <a:br/>
             <a:r>
-              <a:t>Student 'Vinu' posted 100g Beastlife Creatine tub (₹280) seeking gym peers.</a:t>
+              <a:t>Campus Peer (3rd Yr Mech) posted unopened gym supplements seeking campus workout peers.</a:t>
             </a:r>
           </a:p>
         </p:txBody>
@@ -8039,14 +7928,14 @@
         </p:nvSpPr>
         <p:spPr>
           <a:xfrm>
-            <a:off x="6309360" y="1554480"/>
-            <a:ext cx="5120640" cy="4846320"/>
+            <a:off x="6291072" y="1600200"/>
+            <a:ext cx="5166360" cy="4709160"/>
           </a:xfrm>
           <a:prstGeom prst="roundRect">
             <a:avLst/>
           </a:prstGeom>
           <a:solidFill>
-            <a:srgbClr val="F1F5F9"/>
+            <a:srgbClr val="F8FAFC"/>
           </a:solidFill>
           <a:ln>
             <a:solidFill>
@@ -8069,10 +7958,13 @@
           </a:fontRef>
         </p:style>
         <p:txBody>
-          <a:bodyPr rtlCol="0" anchor="ctr" wrap="square"/>
+          <a:bodyPr rtlCol="0" anchor="ctr" wrap="square" lIns="320040" rIns="320040" tIns="292608" bIns="292608"/>
           <a:lstStyle/>
           <a:p>
             <a:pPr algn="ctr">
+              <a:spcAft>
+                <a:spcPts val="1200"/>
+              </a:spcAft>
               <a:defRPr sz="1600" b="1">
                 <a:solidFill>
                   <a:srgbClr val="2563EB"/>
@@ -8086,62 +7978,73 @@
           <a:p>
             <a:pPr>
               <a:spcAft>
-                <a:spcPts val="800"/>
-              </a:spcAft>
-              <a:defRPr sz="1300">
-                <a:solidFill>
-                  <a:srgbClr val="0F172A"/>
-                </a:solidFill>
-              </a:defRPr>
-            </a:pPr>
-            <a:r>
-              <a:t>•  Case 5 (OTT &amp; Study Subscription Splits):</a:t>
+                <a:spcPts val="900"/>
+              </a:spcAft>
+              <a:defRPr sz="1200">
+                <a:solidFill>
+                  <a:srgbClr val="0F172A"/>
+                </a:solidFill>
+              </a:defRPr>
+            </a:pPr>
+            <a:r>
+              <a:t>•  Digital Resource Splits:</a:t>
             </a:r>
             <a:br/>
             <a:r>
-              <a:t>Student 'Bhavesh' posted: 'Netflix mobile plan for sale'. Students frequently seek to split Netflix, Spotify Family, and LeetCode Premium.</a:t>
-            </a:r>
-          </a:p>
-          <a:p>
-            <a:pPr>
-              <a:spcAft>
-                <a:spcPts val="800"/>
-              </a:spcAft>
-              <a:defRPr sz="1300">
-                <a:solidFill>
-                  <a:srgbClr val="0F172A"/>
-                </a:solidFill>
-              </a:defRPr>
-            </a:pPr>
-            <a:r>
-              <a:t>•  Core WhatsApp Breakdown:</a:t>
+              <a:t>Peer Member (3rd Yr CSE) posted seeking campus peers to split costs for shared personal study and entertainment subscriptions.</a:t>
+            </a:r>
+          </a:p>
+          <a:p>
+            <a:pPr>
+              <a:spcAft>
+                <a:spcPts val="900"/>
+              </a:spcAft>
+              <a:defRPr sz="1200">
+                <a:solidFill>
+                  <a:srgbClr val="0F172A"/>
+                </a:solidFill>
+              </a:defRPr>
+            </a:pPr>
+            <a:r>
+              <a:t>•  Group Chat Degradation:</a:t>
             </a:r>
             <a:br/>
             <a:r>
-              <a:t>   • Messages drowned in group chatter within 15 minutes.</a:t>
+              <a:t>Notices drown within minutes amidst active banter, forcing seniors to repeatedly re-post identical messages.</a:t>
+            </a:r>
+          </a:p>
+          <a:p>
+            <a:pPr>
+              <a:spcAft>
+                <a:spcPts val="900"/>
+              </a:spcAft>
+              <a:defRPr sz="1200">
+                <a:solidFill>
+                  <a:srgbClr val="0F172A"/>
+                </a:solidFill>
+              </a:defRPr>
+            </a:pPr>
+            <a:r>
+              <a:t>•  The 'DM for Price' Barrier:</a:t>
             </a:r>
             <a:br/>
             <a:r>
-              <a:t>   • Friction of 'DM for price' haggling with zero price transparency.</a:t>
-            </a:r>
-            <a:br/>
-            <a:r>
-              <a:t>   • Security risk of sharing digital credentials or paying advance UPI to unverified numbers.</a:t>
-            </a:r>
-          </a:p>
-          <a:p>
-            <a:pPr>
-              <a:spcAft>
-                <a:spcPts val="800"/>
-              </a:spcAft>
-              <a:defRPr sz="1300">
-                <a:solidFill>
-                  <a:srgbClr val="0F172A"/>
-                </a:solidFill>
-              </a:defRPr>
-            </a:pPr>
-            <a:r>
-              <a:t>•  Design Intervention: CampusShare provides structured listings with countdown timers, verified Manipal IDs, and transparent fixed pricing.</a:t>
+              <a:t>Opaque pricing causes awkward haggling friction, mutual hesitation, and fear of unverified payment defaults.</a:t>
+            </a:r>
+          </a:p>
+          <a:p>
+            <a:pPr>
+              <a:spcAft>
+                <a:spcPts val="900"/>
+              </a:spcAft>
+              <a:defRPr sz="1200">
+                <a:solidFill>
+                  <a:srgbClr val="0F172A"/>
+                </a:solidFill>
+              </a:defRPr>
+            </a:pPr>
+            <a:r>
+              <a:t>•  Design Intervention: CampusShare delivers structured categories, verified Manipal IDs, upfront pricing, and perishable item timers.</a:t>
             </a:r>
           </a:p>
         </p:txBody>
@@ -8172,7 +8075,7 @@
         </p:nvSpPr>
         <p:spPr>
           <a:xfrm>
-            <a:off x="731520" y="365760"/>
+            <a:off x="731520" y="502920"/>
             <a:ext cx="10728655" cy="1005840"/>
           </a:xfrm>
           <a:prstGeom prst="rect">
@@ -8187,9 +8090,12 @@
           <a:lstStyle/>
           <a:p>
             <a:pPr>
+              <a:spcAft>
+                <a:spcPts val="200"/>
+              </a:spcAft>
               <a:defRPr sz="1100" b="1">
                 <a:solidFill>
-                  <a:srgbClr val="2563EB"/>
+                  <a:srgbClr val="0071E3"/>
                 </a:solidFill>
               </a:defRPr>
             </a:pPr>
@@ -8219,8 +8125,8 @@
         </p:nvSpPr>
         <p:spPr>
           <a:xfrm>
-            <a:off x="731520" y="1280160"/>
-            <a:ext cx="10728655" cy="36576"/>
+            <a:off x="731520" y="1371600"/>
+            <a:ext cx="10728655" cy="22860"/>
           </a:xfrm>
           <a:prstGeom prst="rect">
             <a:avLst/>
@@ -8229,9 +8135,7 @@
             <a:srgbClr val="2563EB"/>
           </a:solidFill>
           <a:ln>
-            <a:solidFill>
-              <a:srgbClr val="2563EB"/>
-            </a:solidFill>
+            <a:noFill/>
           </a:ln>
         </p:spPr>
         <p:style>
@@ -8264,14 +8168,14 @@
         </p:nvSpPr>
         <p:spPr>
           <a:xfrm>
-            <a:off x="1097280" y="1645920"/>
-            <a:ext cx="9997135" cy="2011680"/>
+            <a:off x="731520" y="1600200"/>
+            <a:ext cx="10728655" cy="1691640"/>
           </a:xfrm>
           <a:prstGeom prst="roundRect">
             <a:avLst/>
           </a:prstGeom>
           <a:solidFill>
-            <a:srgbClr val="EFF6FF"/>
+            <a:srgbClr val="F0F7FF"/>
           </a:solidFill>
           <a:ln>
             <a:solidFill>
@@ -8294,13 +8198,16 @@
           </a:fontRef>
         </p:style>
         <p:txBody>
-          <a:bodyPr rtlCol="0" anchor="ctr" wrap="square"/>
+          <a:bodyPr rtlCol="0" anchor="ctr" wrap="square" lIns="365760" rIns="365760" tIns="228600" bIns="228600"/>
           <a:lstStyle/>
           <a:p>
             <a:pPr algn="ctr">
-              <a:defRPr sz="1200" b="1">
-                <a:solidFill>
-                  <a:srgbClr val="2563EB"/>
+              <a:spcAft>
+                <a:spcPts val="400"/>
+              </a:spcAft>
+              <a:defRPr sz="1150" b="1">
+                <a:solidFill>
+                  <a:srgbClr val="0071E3"/>
                 </a:solidFill>
               </a:defRPr>
             </a:pPr>
@@ -8310,17 +8217,14 @@
           </a:p>
           <a:p>
             <a:pPr>
-              <a:spcBef>
-                <a:spcPts val="800"/>
-              </a:spcBef>
-              <a:defRPr sz="1700" b="1">
-                <a:solidFill>
-                  <a:srgbClr val="0F172A"/>
-                </a:solidFill>
-              </a:defRPr>
-            </a:pPr>
-            <a:r>
-              <a:t>“Engineering students at MIT Bengaluru incur recurring financial expenses of ₹2,500–₹4,500 each semester on single-use academic resources because current communication channels lack verification, itemized search, and structured lending models—leaving senior inventory unutilized.”</a:t>
+              <a:defRPr sz="1550" b="1">
+                <a:solidFill>
+                  <a:srgbClr val="0F172A"/>
+                </a:solidFill>
+              </a:defRPr>
+            </a:pPr>
+            <a:r>
+              <a:t>“Undergraduate engineering students at MIT Bengaluru incur substantial recurring financial burdens each semester purchasing temporary academic resources that are abandoned after single-term use, because informal campus communication channels lack verification, itemized search, and structured peer-to-peer lending models—leaving senior student inventory unutilized.”</a:t>
             </a:r>
           </a:p>
         </p:txBody>
@@ -8333,14 +8237,14 @@
         </p:nvSpPr>
         <p:spPr>
           <a:xfrm>
-            <a:off x="1097280" y="3931920"/>
-            <a:ext cx="3200400" cy="2377440"/>
+            <a:off x="731520" y="3520440"/>
+            <a:ext cx="3413455" cy="2788920"/>
           </a:xfrm>
           <a:prstGeom prst="roundRect">
             <a:avLst/>
           </a:prstGeom>
           <a:solidFill>
-            <a:srgbClr val="F1F5F9"/>
+            <a:srgbClr val="F8FAFC"/>
           </a:solidFill>
           <a:ln>
             <a:solidFill>
@@ -8363,7 +8267,7 @@
           </a:fontRef>
         </p:style>
         <p:txBody>
-          <a:bodyPr rtlCol="0" anchor="ctr" wrap="square"/>
+          <a:bodyPr rtlCol="0" anchor="ctr" wrap="square" lIns="274320" rIns="274320" tIns="256032" bIns="256032"/>
           <a:lstStyle/>
           <a:p>
             <a:pPr algn="ctr">
@@ -8374,22 +8278,34 @@
               </a:defRPr>
             </a:pPr>
             <a:r>
+              <a:t>👥 Target Cohort</a:t>
+            </a:r>
+          </a:p>
+          <a:p>
+            <a:pPr>
+              <a:spcAft>
+                <a:spcPts val="800"/>
+              </a:spcAft>
+              <a:defRPr sz="1100" b="1">
+                <a:solidFill>
+                  <a:srgbClr val="64748B"/>
+                </a:solidFill>
+              </a:defRPr>
+            </a:pPr>
+            <a:r>
               <a:t>Who is affected?</a:t>
             </a:r>
           </a:p>
           <a:p>
             <a:pPr>
-              <a:spcBef>
-                <a:spcPts val="800"/>
-              </a:spcBef>
-              <a:defRPr sz="1300">
-                <a:solidFill>
-                  <a:srgbClr val="0F172A"/>
-                </a:solidFill>
-              </a:defRPr>
-            </a:pPr>
-            <a:r>
-              <a:t>1,500+ undergraduate engineering students across CSE, ECE, Mechanical, and Common 1st year.</a:t>
+              <a:defRPr sz="1200">
+                <a:solidFill>
+                  <a:srgbClr val="0F172A"/>
+                </a:solidFill>
+              </a:defRPr>
+            </a:pPr>
+            <a:r>
+              <a:t>Undergraduate engineering students across all academic branches (CSE, IT, ECE, Mechanical, and 1st-Year Common Cycles) residing in campus hostels and day-scholar circles who require temporary coursework tools.</a:t>
             </a:r>
           </a:p>
         </p:txBody>
@@ -8402,14 +8318,14 @@
         </p:nvSpPr>
         <p:spPr>
           <a:xfrm>
-            <a:off x="4526280" y="3931920"/>
-            <a:ext cx="3200400" cy="2377440"/>
+            <a:off x="4389120" y="3520440"/>
+            <a:ext cx="3413455" cy="2788920"/>
           </a:xfrm>
           <a:prstGeom prst="roundRect">
             <a:avLst/>
           </a:prstGeom>
           <a:solidFill>
-            <a:srgbClr val="F1F5F9"/>
+            <a:srgbClr val="F8FAFC"/>
           </a:solidFill>
           <a:ln>
             <a:solidFill>
@@ -8432,7 +8348,7 @@
           </a:fontRef>
         </p:style>
         <p:txBody>
-          <a:bodyPr rtlCol="0" anchor="ctr" wrap="square"/>
+          <a:bodyPr rtlCol="0" anchor="ctr" wrap="square" lIns="274320" rIns="274320" tIns="256032" bIns="256032"/>
           <a:lstStyle/>
           <a:p>
             <a:pPr algn="ctr">
@@ -8443,22 +8359,34 @@
               </a:defRPr>
             </a:pPr>
             <a:r>
-              <a:t>What is the cost?</a:t>
-            </a:r>
-          </a:p>
-          <a:p>
-            <a:pPr>
-              <a:spcBef>
+              <a:t>💸 Core Friction</a:t>
+            </a:r>
+          </a:p>
+          <a:p>
+            <a:pPr>
+              <a:spcAft>
                 <a:spcPts val="800"/>
-              </a:spcBef>
-              <a:defRPr sz="1300">
-                <a:solidFill>
-                  <a:srgbClr val="0F172A"/>
-                </a:solidFill>
-              </a:defRPr>
-            </a:pPr>
-            <a:r>
-              <a:t>Over ₹30 Lakhs spent collectively per year on items discarded or unused after just 16 weeks.</a:t>
+              </a:spcAft>
+              <a:defRPr sz="1100" b="1">
+                <a:solidFill>
+                  <a:srgbClr val="64748B"/>
+                </a:solidFill>
+              </a:defRPr>
+            </a:pPr>
+            <a:r>
+              <a:t>What is the impact?</a:t>
+            </a:r>
+          </a:p>
+          <a:p>
+            <a:pPr>
+              <a:defRPr sz="1200">
+                <a:solidFill>
+                  <a:srgbClr val="0F172A"/>
+                </a:solidFill>
+              </a:defRPr>
+            </a:pPr>
+            <a:r>
+              <a:t>Severe cumulative financial burden on students repeatedly purchasing brand-new instruments and textbooks that become dormant once final examinations conclude, generating needless financial strain and academic waste.</a:t>
             </a:r>
           </a:p>
         </p:txBody>
@@ -8471,14 +8399,14 @@
         </p:nvSpPr>
         <p:spPr>
           <a:xfrm>
-            <a:off x="7955279" y="3931920"/>
-            <a:ext cx="3200400" cy="2377440"/>
+            <a:off x="8046720" y="3520440"/>
+            <a:ext cx="3413455" cy="2788920"/>
           </a:xfrm>
           <a:prstGeom prst="roundRect">
             <a:avLst/>
           </a:prstGeom>
           <a:solidFill>
-            <a:srgbClr val="F1F5F9"/>
+            <a:srgbClr val="F8FAFC"/>
           </a:solidFill>
           <a:ln>
             <a:solidFill>
@@ -8501,7 +8429,7 @@
           </a:fontRef>
         </p:style>
         <p:txBody>
-          <a:bodyPr rtlCol="0" anchor="ctr" wrap="square"/>
+          <a:bodyPr rtlCol="0" anchor="ctr" wrap="square" lIns="274320" rIns="274320" tIns="256032" bIns="256032"/>
           <a:lstStyle/>
           <a:p>
             <a:pPr algn="ctr">
@@ -8512,22 +8440,34 @@
               </a:defRPr>
             </a:pPr>
             <a:r>
-              <a:t>Why now?</a:t>
-            </a:r>
-          </a:p>
-          <a:p>
-            <a:pPr>
-              <a:spcBef>
+              <a:t>🌱 Strategic Timing</a:t>
+            </a:r>
+          </a:p>
+          <a:p>
+            <a:pPr>
+              <a:spcAft>
                 <a:spcPts val="800"/>
-              </a:spcBef>
-              <a:defRPr sz="1300">
-                <a:solidFill>
-                  <a:srgbClr val="0F172A"/>
-                </a:solidFill>
-              </a:defRPr>
-            </a:pPr>
-            <a:r>
-              <a:t>Rising cost of academic supplies combined with MAHE sustainability &amp; zero-waste campus objectives.</a:t>
+              </a:spcAft>
+              <a:defRPr sz="1100" b="1">
+                <a:solidFill>
+                  <a:srgbClr val="64748B"/>
+                </a:solidFill>
+              </a:defRPr>
+            </a:pPr>
+            <a:r>
+              <a:t>Why address it now?</a:t>
+            </a:r>
+          </a:p>
+          <a:p>
+            <a:pPr>
+              <a:defRPr sz="1200">
+                <a:solidFill>
+                  <a:srgbClr val="0F172A"/>
+                </a:solidFill>
+              </a:defRPr>
+            </a:pPr>
+            <a:r>
+              <a:t>Rising cost of academic supplies combined with MAHE's university-wide sustainability mandates, demanding circular student resource lifecycles, zero-waste campus habits, and institutional peer affordability.</a:t>
             </a:r>
           </a:p>
         </p:txBody>
@@ -8558,7 +8498,7 @@
         </p:nvSpPr>
         <p:spPr>
           <a:xfrm>
-            <a:off x="731520" y="365760"/>
+            <a:off x="731520" y="502920"/>
             <a:ext cx="10728655" cy="1005840"/>
           </a:xfrm>
           <a:prstGeom prst="rect">
@@ -8573,9 +8513,12 @@
           <a:lstStyle/>
           <a:p>
             <a:pPr>
+              <a:spcAft>
+                <a:spcPts val="200"/>
+              </a:spcAft>
               <a:defRPr sz="1100" b="1">
                 <a:solidFill>
-                  <a:srgbClr val="2563EB"/>
+                  <a:srgbClr val="0071E3"/>
                 </a:solidFill>
               </a:defRPr>
             </a:pPr>
@@ -8605,8 +8548,8 @@
         </p:nvSpPr>
         <p:spPr>
           <a:xfrm>
-            <a:off x="731520" y="1280160"/>
-            <a:ext cx="10728655" cy="36576"/>
+            <a:off x="731520" y="1371600"/>
+            <a:ext cx="10728655" cy="22860"/>
           </a:xfrm>
           <a:prstGeom prst="rect">
             <a:avLst/>
@@ -8615,9 +8558,7 @@
             <a:srgbClr val="2563EB"/>
           </a:solidFill>
           <a:ln>
-            <a:solidFill>
-              <a:srgbClr val="2563EB"/>
-            </a:solidFill>
+            <a:noFill/>
           </a:ln>
         </p:spPr>
         <p:style>
@@ -8650,14 +8591,14 @@
         </p:nvSpPr>
         <p:spPr>
           <a:xfrm>
-            <a:off x="731520" y="1554480"/>
-            <a:ext cx="5120640" cy="4846320"/>
+            <a:off x="731520" y="1600200"/>
+            <a:ext cx="5166360" cy="4709160"/>
           </a:xfrm>
           <a:prstGeom prst="roundRect">
             <a:avLst/>
           </a:prstGeom>
           <a:solidFill>
-            <a:srgbClr val="F1F5F9"/>
+            <a:srgbClr val="F8FAFC"/>
           </a:solidFill>
           <a:ln>
             <a:solidFill>
@@ -8680,10 +8621,13 @@
           </a:fontRef>
         </p:style>
         <p:txBody>
-          <a:bodyPr rtlCol="0" anchor="ctr" wrap="square"/>
+          <a:bodyPr rtlCol="0" anchor="ctr" wrap="square" lIns="320040" rIns="320040" tIns="292608" bIns="292608"/>
           <a:lstStyle/>
           <a:p>
             <a:pPr algn="ctr">
+              <a:spcAft>
+                <a:spcPts val="1200"/>
+              </a:spcAft>
               <a:defRPr sz="1600" b="1">
                 <a:solidFill>
                   <a:srgbClr val="2563EB"/>
@@ -8697,85 +8641,85 @@
           <a:p>
             <a:pPr>
               <a:spcAft>
-                <a:spcPts val="800"/>
-              </a:spcAft>
-              <a:defRPr sz="1300">
-                <a:solidFill>
-                  <a:srgbClr val="0F172A"/>
-                </a:solidFill>
-              </a:defRPr>
-            </a:pPr>
-            <a:r>
-              <a:t>•  1. Why do students spend thousands every semester on new gear?</a:t>
+                <a:spcPts val="900"/>
+              </a:spcAft>
+              <a:defRPr sz="1200">
+                <a:solidFill>
+                  <a:srgbClr val="0F172A"/>
+                </a:solidFill>
+              </a:defRPr>
+            </a:pPr>
+            <a:r>
+              <a:t>•  1. Why do students purchase expensive new gear repeatedly?</a:t>
             </a:r>
             <a:br/>
             <a:r>
-              <a:t>   Because they don't have access to seniors' unused items.</a:t>
-            </a:r>
-          </a:p>
-          <a:p>
-            <a:pPr>
-              <a:spcAft>
-                <a:spcPts val="800"/>
-              </a:spcAft>
-              <a:defRPr sz="1300">
-                <a:solidFill>
-                  <a:srgbClr val="0F172A"/>
-                </a:solidFill>
-              </a:defRPr>
-            </a:pPr>
-            <a:r>
-              <a:t>•  2. Why can't they access seniors' items?</a:t>
+              <a:t>   Because they lack visibility into surplus items owned by seniors.</a:t>
+            </a:r>
+          </a:p>
+          <a:p>
+            <a:pPr>
+              <a:spcAft>
+                <a:spcPts val="900"/>
+              </a:spcAft>
+              <a:defRPr sz="1200">
+                <a:solidFill>
+                  <a:srgbClr val="0F172A"/>
+                </a:solidFill>
+              </a:defRPr>
+            </a:pPr>
+            <a:r>
+              <a:t>•  2. Why can't juniors easily access seniors' items?</a:t>
             </a:r>
             <a:br/>
             <a:r>
-              <a:t>   Because seniors leave them sitting in hostel rooms.</a:t>
-            </a:r>
-          </a:p>
-          <a:p>
-            <a:pPr>
-              <a:spcAft>
-                <a:spcPts val="800"/>
-              </a:spcAft>
-              <a:defRPr sz="1300">
-                <a:solidFill>
-                  <a:srgbClr val="0F172A"/>
-                </a:solidFill>
-              </a:defRPr>
-            </a:pPr>
-            <a:r>
-              <a:t>•  3. Why don't seniors give or sell them to juniors?</a:t>
+              <a:t>   Because unused items remain locked away in seniors' hostel rooms.</a:t>
+            </a:r>
+          </a:p>
+          <a:p>
+            <a:pPr>
+              <a:spcAft>
+                <a:spcPts val="900"/>
+              </a:spcAft>
+              <a:defRPr sz="1200">
+                <a:solidFill>
+                  <a:srgbClr val="0F172A"/>
+                </a:solidFill>
+              </a:defRPr>
+            </a:pPr>
+            <a:r>
+              <a:t>•  3. Why don't seniors transfer them to incoming juniors?</a:t>
             </a:r>
             <a:br/>
             <a:r>
-              <a:t>   Because posting on social media is inconvenient and gets ignored.</a:t>
-            </a:r>
-          </a:p>
-          <a:p>
-            <a:pPr>
-              <a:spcAft>
-                <a:spcPts val="800"/>
-              </a:spcAft>
-              <a:defRPr sz="1300">
-                <a:solidFill>
-                  <a:srgbClr val="0F172A"/>
-                </a:solidFill>
-              </a:defRPr>
-            </a:pPr>
-            <a:r>
-              <a:t>•  4. Why do existing chat notices get ignored?</a:t>
+              <a:t>   Because posting on informal social groups is disorganized and tedious.</a:t>
+            </a:r>
+          </a:p>
+          <a:p>
+            <a:pPr>
+              <a:spcAft>
+                <a:spcPts val="900"/>
+              </a:spcAft>
+              <a:defRPr sz="1200">
+                <a:solidFill>
+                  <a:srgbClr val="0F172A"/>
+                </a:solidFill>
+              </a:defRPr>
+            </a:pPr>
+            <a:r>
+              <a:t>•  4. Why do existing social chat channels fail?</a:t>
             </a:r>
             <a:br/>
             <a:r>
-              <a:t>   Because WhatsApp groups lack categories, price filters, and search.</a:t>
-            </a:r>
-          </a:p>
-          <a:p>
-            <a:pPr>
-              <a:spcAft>
-                <a:spcPts val="800"/>
-              </a:spcAft>
-              <a:defRPr sz="1300">
+              <a:t>   Because chat groups lack category filtering, price discovery, and search indexing.</a:t>
+            </a:r>
+          </a:p>
+          <a:p>
+            <a:pPr>
+              <a:spcAft>
+                <a:spcPts val="900"/>
+              </a:spcAft>
+              <a:defRPr sz="1200">
                 <a:solidFill>
                   <a:srgbClr val="0F172A"/>
                 </a:solidFill>
@@ -8786,7 +8730,7 @@
             </a:r>
             <a:br/>
             <a:r>
-              <a:t>   The total absence of a dedicated, campus-verified web exchange tailored for student lending and physical handovers.</a:t>
+              <a:t>   The total absence of a dedicated, campus-verified web exchange specifically architected for student peer discovery and physical handovers.</a:t>
             </a:r>
           </a:p>
         </p:txBody>
@@ -8799,14 +8743,14 @@
         </p:nvSpPr>
         <p:spPr>
           <a:xfrm>
-            <a:off x="6309360" y="1554480"/>
-            <a:ext cx="5120640" cy="4846320"/>
+            <a:off x="6291072" y="1600200"/>
+            <a:ext cx="5166360" cy="4709160"/>
           </a:xfrm>
           <a:prstGeom prst="roundRect">
             <a:avLst/>
           </a:prstGeom>
           <a:solidFill>
-            <a:srgbClr val="F1F5F9"/>
+            <a:srgbClr val="F8FAFC"/>
           </a:solidFill>
           <a:ln>
             <a:solidFill>
@@ -8829,10 +8773,13 @@
           </a:fontRef>
         </p:style>
         <p:txBody>
-          <a:bodyPr rtlCol="0" anchor="ctr" wrap="square"/>
+          <a:bodyPr rtlCol="0" anchor="ctr" wrap="square" lIns="320040" rIns="320040" tIns="292608" bIns="292608"/>
           <a:lstStyle/>
           <a:p>
             <a:pPr algn="ctr">
+              <a:spcAft>
+                <a:spcPts val="1200"/>
+              </a:spcAft>
               <a:defRPr sz="1600" b="1">
                 <a:solidFill>
                   <a:srgbClr val="2563EB"/>
@@ -8840,64 +8787,64 @@
               </a:defRPr>
             </a:pPr>
             <a:r>
-              <a:t>How Might We (HMW) Questions</a:t>
-            </a:r>
-          </a:p>
-          <a:p>
-            <a:pPr>
-              <a:spcAft>
-                <a:spcPts val="800"/>
-              </a:spcAft>
-              <a:defRPr sz="1300">
-                <a:solidFill>
-                  <a:srgbClr val="0F172A"/>
-                </a:solidFill>
-              </a:defRPr>
-            </a:pPr>
-            <a:r>
-              <a:t>•  HMW 1 (Affordability):</a:t>
+              <a:t>How Might We (HMW) Opportunity Questions</a:t>
+            </a:r>
+          </a:p>
+          <a:p>
+            <a:pPr>
+              <a:spcAft>
+                <a:spcPts val="900"/>
+              </a:spcAft>
+              <a:defRPr sz="1200">
+                <a:solidFill>
+                  <a:srgbClr val="0F172A"/>
+                </a:solidFill>
+              </a:defRPr>
+            </a:pPr>
+            <a:r>
+              <a:t>•  HMW 1 (Economic Affordability):</a:t>
             </a:r>
             <a:br/>
             <a:r>
-              <a:t>How might we make essential 1-semester lab gear and reference books accessible at zero or near-zero cost for freshers?</a:t>
-            </a:r>
-          </a:p>
-          <a:p>
-            <a:pPr>
-              <a:spcAft>
-                <a:spcPts val="800"/>
-              </a:spcAft>
-              <a:defRPr sz="1300">
-                <a:solidFill>
-                  <a:srgbClr val="0F172A"/>
-                </a:solidFill>
-              </a:defRPr>
-            </a:pPr>
-            <a:r>
-              <a:t>•  HMW 2 (Trust &amp; Friction):</a:t>
+              <a:t>How might we make essential specialized lab gear and reference materials accessible at zero or nominal cost for every student?</a:t>
+            </a:r>
+          </a:p>
+          <a:p>
+            <a:pPr>
+              <a:spcAft>
+                <a:spcPts val="900"/>
+              </a:spcAft>
+              <a:defRPr sz="1200">
+                <a:solidFill>
+                  <a:srgbClr val="0F172A"/>
+                </a:solidFill>
+              </a:defRPr>
+            </a:pPr>
+            <a:r>
+              <a:t>•  HMW 2 (Institutional Trust):</a:t>
             </a:r>
             <a:br/>
             <a:r>
-              <a:t>How might we verify that both buyers and lenders are genuine campus peers without requiring complex identity procedures?</a:t>
-            </a:r>
-          </a:p>
-          <a:p>
-            <a:pPr>
-              <a:spcAft>
-                <a:spcPts val="800"/>
-              </a:spcAft>
-              <a:defRPr sz="1300">
-                <a:solidFill>
-                  <a:srgbClr val="0F172A"/>
-                </a:solidFill>
-              </a:defRPr>
-            </a:pPr>
-            <a:r>
-              <a:t>•  HMW 3 (Handover Convenience):</a:t>
+              <a:t>How might we guarantee that transaction participants are verified university peers without imposing cumbersome verification workflows?</a:t>
+            </a:r>
+          </a:p>
+          <a:p>
+            <a:pPr>
+              <a:spcAft>
+                <a:spcPts val="900"/>
+              </a:spcAft>
+              <a:defRPr sz="1200">
+                <a:solidFill>
+                  <a:srgbClr val="0F172A"/>
+                </a:solidFill>
+              </a:defRPr>
+            </a:pPr>
+            <a:r>
+              <a:t>•  HMW 3 (Frictionless Exchange):</a:t>
             </a:r>
             <a:br/>
             <a:r>
-              <a:t>How might we coordinate handovers at standard campus landmarks (e.g. Central Library, Food Court) without shipping fees or delays?</a:t>
+              <a:t>How might we coordinate physical handovers at common campus landmarks without shipping delays or logistical confusion?</a:t>
             </a:r>
           </a:p>
         </p:txBody>
@@ -8928,7 +8875,7 @@
         </p:nvSpPr>
         <p:spPr>
           <a:xfrm>
-            <a:off x="731520" y="365760"/>
+            <a:off x="731520" y="502920"/>
             <a:ext cx="10728655" cy="1005840"/>
           </a:xfrm>
           <a:prstGeom prst="rect">
@@ -8943,9 +8890,12 @@
           <a:lstStyle/>
           <a:p>
             <a:pPr>
+              <a:spcAft>
+                <a:spcPts val="200"/>
+              </a:spcAft>
               <a:defRPr sz="1100" b="1">
                 <a:solidFill>
-                  <a:srgbClr val="2563EB"/>
+                  <a:srgbClr val="0071E3"/>
                 </a:solidFill>
               </a:defRPr>
             </a:pPr>
@@ -8975,8 +8925,8 @@
         </p:nvSpPr>
         <p:spPr>
           <a:xfrm>
-            <a:off x="731520" y="1280160"/>
-            <a:ext cx="10728655" cy="36576"/>
+            <a:off x="731520" y="1371600"/>
+            <a:ext cx="10728655" cy="22860"/>
           </a:xfrm>
           <a:prstGeom prst="rect">
             <a:avLst/>
@@ -8985,9 +8935,7 @@
             <a:srgbClr val="2563EB"/>
           </a:solidFill>
           <a:ln>
-            <a:solidFill>
-              <a:srgbClr val="2563EB"/>
-            </a:solidFill>
+            <a:noFill/>
           </a:ln>
         </p:spPr>
         <p:style>
@@ -9020,14 +8968,14 @@
         </p:nvSpPr>
         <p:spPr>
           <a:xfrm>
-            <a:off x="731520" y="1554480"/>
-            <a:ext cx="5120640" cy="4846320"/>
+            <a:off x="731520" y="1600200"/>
+            <a:ext cx="5166360" cy="4709160"/>
           </a:xfrm>
           <a:prstGeom prst="roundRect">
             <a:avLst/>
           </a:prstGeom>
           <a:solidFill>
-            <a:srgbClr val="F1F5F9"/>
+            <a:srgbClr val="F8FAFC"/>
           </a:solidFill>
           <a:ln>
             <a:solidFill>
@@ -9050,10 +8998,13 @@
           </a:fontRef>
         </p:style>
         <p:txBody>
-          <a:bodyPr rtlCol="0" anchor="ctr" wrap="square"/>
+          <a:bodyPr rtlCol="0" anchor="ctr" wrap="square" lIns="320040" rIns="320040" tIns="292608" bIns="292608"/>
           <a:lstStyle/>
           <a:p>
             <a:pPr algn="ctr">
+              <a:spcAft>
+                <a:spcPts val="1200"/>
+              </a:spcAft>
               <a:defRPr sz="1600" b="1">
                 <a:solidFill>
                   <a:srgbClr val="2563EB"/>
@@ -9061,67 +9012,67 @@
               </a:defRPr>
             </a:pPr>
             <a:r>
-              <a:t>Free Brainstorming &amp; Selection</a:t>
-            </a:r>
-          </a:p>
-          <a:p>
-            <a:pPr>
-              <a:spcAft>
-                <a:spcPts val="800"/>
-              </a:spcAft>
-              <a:defRPr sz="1300">
-                <a:solidFill>
-                  <a:srgbClr val="0F172A"/>
-                </a:solidFill>
-              </a:defRPr>
-            </a:pPr>
-            <a:r>
-              <a:t>•  Idea A: Physical bulletin board in cafeteria — Rejected (Requires manual paper upkeep, no real-time availability tracking).</a:t>
-            </a:r>
-          </a:p>
-          <a:p>
-            <a:pPr>
-              <a:spcAft>
-                <a:spcPts val="800"/>
-              </a:spcAft>
-              <a:defRPr sz="1300">
-                <a:solidFill>
-                  <a:srgbClr val="0F172A"/>
-                </a:solidFill>
-              </a:defRPr>
-            </a:pPr>
-            <a:r>
-              <a:t>•  Idea B: Departmental rental locker system — Rejected (High hardware cost, requires college administration approval).</a:t>
-            </a:r>
-          </a:p>
-          <a:p>
-            <a:pPr>
-              <a:spcAft>
-                <a:spcPts val="800"/>
-              </a:spcAft>
-              <a:defRPr sz="1300">
-                <a:solidFill>
-                  <a:srgbClr val="0F172A"/>
-                </a:solidFill>
-              </a:defRPr>
-            </a:pPr>
-            <a:r>
-              <a:t>•  Idea C: CampusShare Web Application — SELECTED (Zero overhead, instant search, accessible from student phones, no app store download needed).</a:t>
-            </a:r>
-          </a:p>
-          <a:p>
-            <a:pPr>
-              <a:spcAft>
-                <a:spcPts val="800"/>
-              </a:spcAft>
-              <a:defRPr sz="1300">
-                <a:solidFill>
-                  <a:srgbClr val="0F172A"/>
-                </a:solidFill>
-              </a:defRPr>
-            </a:pPr>
-            <a:r>
-              <a:t>•  Key differentiator: Multi-mode exchange model (Borrow, Rent, Buy).</a:t>
+              <a:t>Free Brainstorming &amp; Concept Selection</a:t>
+            </a:r>
+          </a:p>
+          <a:p>
+            <a:pPr>
+              <a:spcAft>
+                <a:spcPts val="900"/>
+              </a:spcAft>
+              <a:defRPr sz="1200">
+                <a:solidFill>
+                  <a:srgbClr val="0F172A"/>
+                </a:solidFill>
+              </a:defRPr>
+            </a:pPr>
+            <a:r>
+              <a:t>•  Idea A: Physical bulletin boards in cafeteria — Discarded (Requires manual paper upkeep, lacks real-time item status, no digital search).</a:t>
+            </a:r>
+          </a:p>
+          <a:p>
+            <a:pPr>
+              <a:spcAft>
+                <a:spcPts val="900"/>
+              </a:spcAft>
+              <a:defRPr sz="1200">
+                <a:solidFill>
+                  <a:srgbClr val="0F172A"/>
+                </a:solidFill>
+              </a:defRPr>
+            </a:pPr>
+            <a:r>
+              <a:t>•  Idea B: Departmental rental hardware lockers — Discarded (High capital installation cost, maintenance complexity, institutional approval delays).</a:t>
+            </a:r>
+          </a:p>
+          <a:p>
+            <a:pPr>
+              <a:spcAft>
+                <a:spcPts val="900"/>
+              </a:spcAft>
+              <a:defRPr sz="1200">
+                <a:solidFill>
+                  <a:srgbClr val="0F172A"/>
+                </a:solidFill>
+              </a:defRPr>
+            </a:pPr>
+            <a:r>
+              <a:t>•  Idea C: CampusShare Web Application — SELECTED (Zero overhead, instant search, accessible from student smartphones, no app store download required).</a:t>
+            </a:r>
+          </a:p>
+          <a:p>
+            <a:pPr>
+              <a:spcAft>
+                <a:spcPts val="900"/>
+              </a:spcAft>
+              <a:defRPr sz="1200">
+                <a:solidFill>
+                  <a:srgbClr val="0F172A"/>
+                </a:solidFill>
+              </a:defRPr>
+            </a:pPr>
+            <a:r>
+              <a:t>•  Core Architectural Advantage: Multi-modal transaction framework accommodating borrowing, renting, surplus claiming, and permanent transfers.</a:t>
             </a:r>
           </a:p>
         </p:txBody>
@@ -9134,14 +9085,14 @@
         </p:nvSpPr>
         <p:spPr>
           <a:xfrm>
-            <a:off x="6309360" y="1554480"/>
-            <a:ext cx="5120640" cy="4846320"/>
+            <a:off x="6291072" y="1600200"/>
+            <a:ext cx="5166360" cy="4709160"/>
           </a:xfrm>
           <a:prstGeom prst="roundRect">
             <a:avLst/>
           </a:prstGeom>
           <a:solidFill>
-            <a:srgbClr val="F1F5F9"/>
+            <a:srgbClr val="F8FAFC"/>
           </a:solidFill>
           <a:ln>
             <a:solidFill>
@@ -9164,10 +9115,13 @@
           </a:fontRef>
         </p:style>
         <p:txBody>
-          <a:bodyPr rtlCol="0" anchor="ctr" wrap="square"/>
+          <a:bodyPr rtlCol="0" anchor="ctr" wrap="square" lIns="320040" rIns="320040" tIns="292608" bIns="292608"/>
           <a:lstStyle/>
           <a:p>
             <a:pPr algn="ctr">
+              <a:spcAft>
+                <a:spcPts val="1200"/>
+              </a:spcAft>
               <a:defRPr sz="1600" b="1">
                 <a:solidFill>
                   <a:srgbClr val="2563EB"/>
@@ -9181,96 +9135,76 @@
           <a:p>
             <a:pPr>
               <a:spcAft>
-                <a:spcPts val="800"/>
-              </a:spcAft>
-              <a:defRPr sz="1300">
-                <a:solidFill>
-                  <a:srgbClr val="0F172A"/>
-                </a:solidFill>
-              </a:defRPr>
-            </a:pPr>
-            <a:r>
-              <a:t>•  1. Verified Student Trust: Sign-in / request validation tied to @learner.manipal.edu credentials.</a:t>
-            </a:r>
-          </a:p>
-          <a:p>
-            <a:pPr>
-              <a:spcAft>
-                <a:spcPts val="800"/>
-              </a:spcAft>
-              <a:defRPr sz="1300">
-                <a:solidFill>
-                  <a:srgbClr val="0F172A"/>
-                </a:solidFill>
-              </a:defRPr>
-            </a:pPr>
-            <a:r>
-              <a:t>•  2. Flexible Exchange Options:</a:t>
-            </a:r>
-            <a:br/>
-            <a:r>
-              <a:t>   • Borrow (Free for 1 semester with return guarantee)</a:t>
-            </a:r>
-            <a:br/>
-            <a:r>
-              <a:t>   • Rent (₹20-50/week for exam prep)</a:t>
-            </a:r>
-            <a:br/>
-            <a:r>
-              <a:t>   • Buy (70-80% discounted permanent purchase)</a:t>
-            </a:r>
-          </a:p>
-          <a:p>
-            <a:pPr>
-              <a:spcAft>
-                <a:spcPts val="800"/>
-              </a:spcAft>
-              <a:defRPr sz="1300">
-                <a:solidFill>
-                  <a:srgbClr val="0F172A"/>
-                </a:solidFill>
-              </a:defRPr>
-            </a:pPr>
-            <a:r>
-              <a:t>•  3. 🚨 Express Exam &amp; Lab SOS (Single-Use):</a:t>
-            </a:r>
-            <a:br/>
-            <a:r>
-              <a:t>   Immediate 3-hour micro-rentals (₹20) for scientific calculators on exam morning or lab aprons outside exam halls.</a:t>
-            </a:r>
-          </a:p>
-          <a:p>
-            <a:pPr>
-              <a:spcAft>
-                <a:spcPts val="800"/>
-              </a:spcAft>
-              <a:defRPr sz="1300">
-                <a:solidFill>
-                  <a:srgbClr val="0F172A"/>
-                </a:solidFill>
-              </a:defRPr>
-            </a:pPr>
-            <a:r>
-              <a:t>•  4. ⚡ Flash Drops (All-Day Food Surplus &amp; Online Misfits):</a:t>
-            </a:r>
-            <a:br/>
-            <a:r>
-              <a:t>   Eliminates spammy 'DM for price' messages with 100% price transparency, active expiry timers on hot/fresh food (lunch biryani, extra snacks, late-night bites), and instant hostel/food court handovers.</a:t>
-            </a:r>
-          </a:p>
-          <a:p>
-            <a:pPr>
-              <a:spcAft>
-                <a:spcPts val="800"/>
-              </a:spcAft>
-              <a:defRPr sz="1300">
-                <a:solidFill>
-                  <a:srgbClr val="0F172A"/>
-                </a:solidFill>
-              </a:defRPr>
-            </a:pPr>
-            <a:r>
-              <a:t>•  5. Landmark-Based Campus Handover (Central Library, Food Court, Hostel Blocks 1, 2, 3).</a:t>
+                <a:spcPts val="900"/>
+              </a:spcAft>
+              <a:defRPr sz="1200">
+                <a:solidFill>
+                  <a:srgbClr val="0F172A"/>
+                </a:solidFill>
+              </a:defRPr>
+            </a:pPr>
+            <a:r>
+              <a:t>•  1. Institutional Peer Verification: Sign-in and request authentication restricted to verified @learner.manipal.edu credentials.</a:t>
+            </a:r>
+          </a:p>
+          <a:p>
+            <a:pPr>
+              <a:spcAft>
+                <a:spcPts val="900"/>
+              </a:spcAft>
+              <a:defRPr sz="1200">
+                <a:solidFill>
+                  <a:srgbClr val="0F172A"/>
+                </a:solidFill>
+              </a:defRPr>
+            </a:pPr>
+            <a:r>
+              <a:t>•  2. Flexible Exchange Options: Free semester loans, low-cost examination rentals, and deep-discount permanent handovers.</a:t>
+            </a:r>
+          </a:p>
+          <a:p>
+            <a:pPr>
+              <a:spcAft>
+                <a:spcPts val="900"/>
+              </a:spcAft>
+              <a:defRPr sz="1200">
+                <a:solidFill>
+                  <a:srgbClr val="0F172A"/>
+                </a:solidFill>
+              </a:defRPr>
+            </a:pPr>
+            <a:r>
+              <a:t>•  3. 🚨 Express Exam &amp; Lab SOS: Instant micro-rentals for emergency scientific calculator and lab coat needs directly outside examination blocks.</a:t>
+            </a:r>
+          </a:p>
+          <a:p>
+            <a:pPr>
+              <a:spcAft>
+                <a:spcPts val="900"/>
+              </a:spcAft>
+              <a:defRPr sz="1200">
+                <a:solidFill>
+                  <a:srgbClr val="0F172A"/>
+                </a:solidFill>
+              </a:defRPr>
+            </a:pPr>
+            <a:r>
+              <a:t>•  4. ⚡ Flash Surplus Drops: Fixed upfront prices with expiration countdowns for hostel dining and pantry surplus, eliminating 'DM for price' spam.</a:t>
+            </a:r>
+          </a:p>
+          <a:p>
+            <a:pPr>
+              <a:spcAft>
+                <a:spcPts val="900"/>
+              </a:spcAft>
+              <a:defRPr sz="1200">
+                <a:solidFill>
+                  <a:srgbClr val="0F172A"/>
+                </a:solidFill>
+              </a:defRPr>
+            </a:pPr>
+            <a:r>
+              <a:t>•  5. Designated Landmark Handovers: Safe physical coordination anchored at recognized campus spots (Central Library, Food Court, Hostel Foyers).</a:t>
             </a:r>
           </a:p>
         </p:txBody>

--- a/Design Thinking_Internship.pptx
+++ b/Design Thinking_Internship.pptx
@@ -3293,7 +3293,7 @@
               </a:defRPr>
             </a:pPr>
             <a:r>
-              <a:t>1. Team Member 1 (Reg. No: 2309xxxxx)</a:t>
+              <a:t>1. Sridhar Madhira (Reg. No: 2309xxxxx)</a:t>
             </a:r>
           </a:p>
           <a:p>
@@ -3308,7 +3308,7 @@
               </a:defRPr>
             </a:pPr>
             <a:r>
-              <a:t>2. Team Member 2 (Reg. No: 2309xxxxx)</a:t>
+              <a:t>2. Priyansh Kashyap | CSE (AI) (Reg. No: 235890468)</a:t>
             </a:r>
           </a:p>
         </p:txBody>
